--- a/sjoskolan/vecka-45/aktuell/v45_01_Systematisk_felsokning_elev.pptx
+++ b/sjoskolan/vecka-45/aktuell/v45_01_Systematisk_felsokning_elev.pptx
@@ -6037,7 +6037,117 @@
                 <a:ea typeface="Calibri"/>
                 <a:cs typeface="Calibri"/>
               </a:rPr>
-              <a:t>Uresistor = R · I     Ukontakt = Ukälla − Uresistor</a:t>
+              <a:t>U</a:t>
+            </a:r>
+            <a:r>
+              <a:rPr sz="2400" b="1" baseline="-25000">
+                <a:solidFill>
+                  <a:srgbClr val="064F91"/>
+                </a:solidFill>
+                <a:latin typeface="Calibri"/>
+                <a:ea typeface="Calibri"/>
+                <a:cs typeface="Calibri"/>
+              </a:rPr>
+              <a:t>resistor</a:t>
+            </a:r>
+            <a:r>
+              <a:rPr sz="2400" b="1">
+                <a:solidFill>
+                  <a:srgbClr val="064F91"/>
+                </a:solidFill>
+                <a:latin typeface="Calibri"/>
+                <a:ea typeface="Calibri"/>
+                <a:cs typeface="Calibri"/>
+              </a:rPr>
+              <a:t> = R · I     </a:t>
+            </a:r>
+            <a:r>
+              <a:rPr sz="2400" b="1">
+                <a:solidFill>
+                  <a:srgbClr val="064F91"/>
+                </a:solidFill>
+                <a:latin typeface="Calibri"/>
+                <a:ea typeface="Calibri"/>
+                <a:cs typeface="Calibri"/>
+              </a:rPr>
+              <a:t>U</a:t>
+            </a:r>
+            <a:r>
+              <a:rPr sz="2400" b="1" baseline="-25000">
+                <a:solidFill>
+                  <a:srgbClr val="064F91"/>
+                </a:solidFill>
+                <a:latin typeface="Calibri"/>
+                <a:ea typeface="Calibri"/>
+                <a:cs typeface="Calibri"/>
+              </a:rPr>
+              <a:t>kontakt</a:t>
+            </a:r>
+            <a:r>
+              <a:rPr sz="2400" b="1">
+                <a:solidFill>
+                  <a:srgbClr val="064F91"/>
+                </a:solidFill>
+                <a:latin typeface="Calibri"/>
+                <a:ea typeface="Calibri"/>
+                <a:cs typeface="Calibri"/>
+              </a:rPr>
+              <a:t> = </a:t>
+            </a:r>
+            <a:r>
+              <a:rPr sz="2400" b="1">
+                <a:solidFill>
+                  <a:srgbClr val="064F91"/>
+                </a:solidFill>
+                <a:latin typeface="Calibri"/>
+                <a:ea typeface="Calibri"/>
+                <a:cs typeface="Calibri"/>
+              </a:rPr>
+              <a:t>U</a:t>
+            </a:r>
+            <a:r>
+              <a:rPr sz="2400" b="1" baseline="-25000">
+                <a:solidFill>
+                  <a:srgbClr val="064F91"/>
+                </a:solidFill>
+                <a:latin typeface="Calibri"/>
+                <a:ea typeface="Calibri"/>
+                <a:cs typeface="Calibri"/>
+              </a:rPr>
+              <a:t>källa</a:t>
+            </a:r>
+            <a:r>
+              <a:rPr sz="2400" b="1">
+                <a:solidFill>
+                  <a:srgbClr val="064F91"/>
+                </a:solidFill>
+                <a:latin typeface="Calibri"/>
+                <a:ea typeface="Calibri"/>
+                <a:cs typeface="Calibri"/>
+              </a:rPr>
+              <a:t> − </a:t>
+            </a:r>
+            <a:r>
+              <a:rPr sz="2400" b="1">
+                <a:solidFill>
+                  <a:srgbClr val="064F91"/>
+                </a:solidFill>
+                <a:latin typeface="Calibri"/>
+                <a:ea typeface="Calibri"/>
+                <a:cs typeface="Calibri"/>
+              </a:rPr>
+              <a:t>U</a:t>
+            </a:r>
+            <a:r>
+              <a:rPr sz="2400" b="1" baseline="-25000">
+                <a:solidFill>
+                  <a:srgbClr val="064F91"/>
+                </a:solidFill>
+                <a:latin typeface="Calibri"/>
+                <a:ea typeface="Calibri"/>
+                <a:cs typeface="Calibri"/>
+              </a:rPr>
+              <a:t>resistor</a:t>
             </a:r>
           </a:p>
         </p:txBody>
@@ -6449,7 +6559,7 @@
         <p:spPr>
           <a:xfrm xmlns:a="http://schemas.openxmlformats.org/drawingml/2006/main">
             <a:off x="762000" y="2533650"/>
-            <a:ext cx="7620000" cy="2286000"/>
+            <a:ext cx="3886200" cy="2606040"/>
           </a:xfrm>
           <a:prstGeom xmlns:a="http://schemas.openxmlformats.org/drawingml/2006/main" prst="rect">
             <a:avLst/>
@@ -6485,7 +6595,7 @@
                 <a:ea typeface="Calibri"/>
                 <a:cs typeface="Calibri"/>
               </a:rPr>
-              <a:t>24 V matar en resistor via en enda öppen kontakt. Returen är hel. Vilken ström går, och vilken ideal spänning ligger över kontakten?</a:t>
+              <a:t>24 V matar en resistor via en enda öppen kontakt. Returen är hel. Vilken ström går, och vilken ideal spänning ligger över kontakten?</a:t>
             </a:r>
           </a:p>
         </p:txBody>
@@ -6606,6 +6716,30 @@
           </a:p>
         </p:txBody>
       </p:sp>
+      <p:pic xmlns:a="http://schemas.openxmlformats.org/drawingml/2006/main" xmlns:r="http://schemas.openxmlformats.org/officeDocument/2006/relationships">
+        <p:nvPicPr>
+          <p:cNvPr id="9" name="Figur: 24 V matar en resistor via en öppen kont" descr="24 V matar en resistor via en öppen kontakt; ström och spänning över kontakten okända"/>
+          <p:cNvPicPr>
+            <a:picLocks noChangeAspect="1"/>
+          </p:cNvPicPr>
+          <p:nvPr/>
+        </p:nvPicPr>
+        <p:blipFill>
+          <a:blip r:embed="rId3"/>
+          <a:stretch>
+            <a:fillRect/>
+          </a:stretch>
+        </p:blipFill>
+        <p:spPr>
+          <a:xfrm>
+            <a:off x="4846320" y="2331720"/>
+            <a:ext cx="3931920" cy="2740984"/>
+          </a:xfrm>
+          <a:prstGeom prst="rect">
+            <a:avLst/>
+          </a:prstGeom>
+        </p:spPr>
+      </p:pic>
     </p:spTree>
     <p:extLst>
       <p:ext uri="{BB962C8B-B14F-4D97-AF65-F5344CB8AC3E}">
@@ -6761,7 +6895,29 @@
                 <a:ea typeface="Calibri"/>
                 <a:cs typeface="Calibri"/>
               </a:rPr>
-              <a:t>I = U/Rtotal</a:t>
+              <a:t>I = U/</a:t>
+            </a:r>
+            <a:r>
+              <a:rPr sz="2400" b="1">
+                <a:solidFill>
+                  <a:srgbClr val="064F91"/>
+                </a:solidFill>
+                <a:latin typeface="Calibri"/>
+                <a:ea typeface="Calibri"/>
+                <a:cs typeface="Calibri"/>
+              </a:rPr>
+              <a:t>R</a:t>
+            </a:r>
+            <a:r>
+              <a:rPr sz="2400" b="1" baseline="-25000">
+                <a:solidFill>
+                  <a:srgbClr val="064F91"/>
+                </a:solidFill>
+                <a:latin typeface="Calibri"/>
+                <a:ea typeface="Calibri"/>
+                <a:cs typeface="Calibri"/>
+              </a:rPr>
+              <a:t>total</a:t>
             </a:r>
           </a:p>
         </p:txBody>
@@ -6818,7 +6974,29 @@
                 <a:ea typeface="Calibri"/>
                 <a:cs typeface="Calibri"/>
               </a:rPr>
-              <a:t>Rtotal omfattar hela den oavsiktliga strömvägen i modellen. V/Ω ger A.</a:t>
+              <a:t>R</a:t>
+            </a:r>
+            <a:r>
+              <a:rPr sz="2100" b="0" baseline="-25000">
+                <a:solidFill>
+                  <a:srgbClr val="111111"/>
+                </a:solidFill>
+                <a:latin typeface="Calibri"/>
+                <a:ea typeface="Calibri"/>
+                <a:cs typeface="Calibri"/>
+              </a:rPr>
+              <a:t>total</a:t>
+            </a:r>
+            <a:r>
+              <a:rPr sz="2100" b="0">
+                <a:solidFill>
+                  <a:srgbClr val="111111"/>
+                </a:solidFill>
+                <a:latin typeface="Calibri"/>
+                <a:ea typeface="Calibri"/>
+                <a:cs typeface="Calibri"/>
+              </a:rPr>
+              <a:t> omfattar hela den oavsiktliga strömvägen i modellen. V/Ω ger A.</a:t>
             </a:r>
           </a:p>
         </p:txBody>
@@ -8755,7 +8933,7 @@
                 <a:ea typeface="Calibri"/>
                 <a:cs typeface="Calibri"/>
               </a:rPr>
-              <a:t>0,20 Ω vid 10 A ger 2 V fall och 20 W värme.</a:t>
+              <a:t>0,15 Ω vid 8 A ger 1,2 V fall och 9,6 W värme.</a:t>
             </a:r>
           </a:p>
           <a:p xmlns:a="http://schemas.openxmlformats.org/drawingml/2006/main">
@@ -9139,7 +9317,7 @@
                 <a:ea typeface="Calibri"/>
                 <a:cs typeface="Calibri"/>
               </a:rPr>
-              <a:t>Normal spolspänning under START men bortfall efter släpp</a:t>
+              <a:t>Välj en mätpunkt och ett driftläge där de två hypoteserna</a:t>
             </a:r>
           </a:p>
           <a:p xmlns:a="http://schemas.openxmlformats.org/drawingml/2006/main">
@@ -9163,7 +9341,7 @@
                 <a:ea typeface="Calibri"/>
                 <a:cs typeface="Calibri"/>
               </a:rPr>
-              <a:t>pekar mot hållfunktionen. Nästa kontroll prövar den vägen.</a:t>
+              <a:t>förutsäger olika värden. Skriv förväntat värde före mätningen.</a:t>
             </a:r>
           </a:p>
         </p:txBody>
@@ -9346,7 +9524,7 @@
         <p:spPr>
           <a:xfrm xmlns:a="http://schemas.openxmlformats.org/drawingml/2006/main">
             <a:off x="762000" y="1571625"/>
-            <a:ext cx="7620000" cy="990600"/>
+            <a:ext cx="3977639" cy="990600"/>
           </a:xfrm>
           <a:prstGeom xmlns:a="http://schemas.openxmlformats.org/drawingml/2006/main" prst="rect">
             <a:avLst/>
@@ -9373,15 +9551,15 @@
               </a:defRPr>
             </a:pPr>
             <a:r>
-              <a:rPr sz="2175" b="0">
-                <a:solidFill>
-                  <a:srgbClr val="111111"/>
-                </a:solidFill>
-                <a:latin typeface="Calibri"/>
-                <a:ea typeface="Calibri"/>
-                <a:cs typeface="Calibri"/>
-              </a:rPr>
-              <a:t>Källan håller 12 V under last. Lasten får 10 V vid 2 A. Övriga fall försummas.</a:t>
+              <a:rPr sz="2100" b="0">
+                <a:solidFill>
+                  <a:srgbClr val="111111"/>
+                </a:solidFill>
+                <a:latin typeface="Calibri"/>
+                <a:ea typeface="Calibri"/>
+                <a:cs typeface="Calibri"/>
+              </a:rPr>
+              <a:t>Källan håller 12 V under last. Lasten får 10 V vid 2 A. Övriga fall försummas.</a:t>
             </a:r>
           </a:p>
         </p:txBody>
@@ -9403,7 +9581,7 @@
         <p:spPr>
           <a:xfrm xmlns:a="http://schemas.openxmlformats.org/drawingml/2006/main">
             <a:off x="762000" y="2705100"/>
-            <a:ext cx="7620000" cy="790575"/>
+            <a:ext cx="3977639" cy="790575"/>
           </a:xfrm>
           <a:prstGeom xmlns:a="http://schemas.openxmlformats.org/drawingml/2006/main" prst="rect">
             <a:avLst/>
@@ -9438,7 +9616,95 @@
                 <a:ea typeface="Calibri"/>
                 <a:cs typeface="Calibri"/>
               </a:rPr>
-              <a:t>Rextra = (Ukälla − Ulast)/I     P = I²Rextra</a:t>
+              <a:t>R</a:t>
+            </a:r>
+            <a:r>
+              <a:rPr sz="2325" b="1" baseline="-25000">
+                <a:solidFill>
+                  <a:srgbClr val="064F91"/>
+                </a:solidFill>
+                <a:latin typeface="Calibri"/>
+                <a:ea typeface="Calibri"/>
+                <a:cs typeface="Calibri"/>
+              </a:rPr>
+              <a:t>extra</a:t>
+            </a:r>
+            <a:r>
+              <a:rPr sz="2325" b="1">
+                <a:solidFill>
+                  <a:srgbClr val="064F91"/>
+                </a:solidFill>
+                <a:latin typeface="Calibri"/>
+                <a:ea typeface="Calibri"/>
+                <a:cs typeface="Calibri"/>
+              </a:rPr>
+              <a:t> = (</a:t>
+            </a:r>
+            <a:r>
+              <a:rPr sz="2325" b="1">
+                <a:solidFill>
+                  <a:srgbClr val="064F91"/>
+                </a:solidFill>
+                <a:latin typeface="Calibri"/>
+                <a:ea typeface="Calibri"/>
+                <a:cs typeface="Calibri"/>
+              </a:rPr>
+              <a:t>U</a:t>
+            </a:r>
+            <a:r>
+              <a:rPr sz="2325" b="1" baseline="-25000">
+                <a:solidFill>
+                  <a:srgbClr val="064F91"/>
+                </a:solidFill>
+                <a:latin typeface="Calibri"/>
+                <a:ea typeface="Calibri"/>
+                <a:cs typeface="Calibri"/>
+              </a:rPr>
+              <a:t>källa</a:t>
+            </a:r>
+            <a:r>
+              <a:rPr sz="2325" b="1">
+                <a:solidFill>
+                  <a:srgbClr val="064F91"/>
+                </a:solidFill>
+                <a:latin typeface="Calibri"/>
+                <a:ea typeface="Calibri"/>
+                <a:cs typeface="Calibri"/>
+              </a:rPr>
+              <a:t> − </a:t>
+            </a:r>
+            <a:r>
+              <a:rPr sz="2325" b="1">
+                <a:solidFill>
+                  <a:srgbClr val="064F91"/>
+                </a:solidFill>
+                <a:latin typeface="Calibri"/>
+                <a:ea typeface="Calibri"/>
+                <a:cs typeface="Calibri"/>
+              </a:rPr>
+              <a:t>U</a:t>
+            </a:r>
+            <a:r>
+              <a:rPr sz="2325" b="1" baseline="-25000">
+                <a:solidFill>
+                  <a:srgbClr val="064F91"/>
+                </a:solidFill>
+                <a:latin typeface="Calibri"/>
+                <a:ea typeface="Calibri"/>
+                <a:cs typeface="Calibri"/>
+              </a:rPr>
+              <a:t>last</a:t>
+            </a:r>
+            <a:r>
+              <a:rPr sz="2325" b="1">
+                <a:solidFill>
+                  <a:srgbClr val="064F91"/>
+                </a:solidFill>
+                <a:latin typeface="Calibri"/>
+                <a:ea typeface="Calibri"/>
+                <a:cs typeface="Calibri"/>
+              </a:rPr>
+              <a:t>)/I     P = I²Rextra</a:t>
             </a:r>
           </a:p>
         </p:txBody>
@@ -9460,7 +9726,7 @@
         <p:spPr>
           <a:xfrm xmlns:a="http://schemas.openxmlformats.org/drawingml/2006/main">
             <a:off x="762000" y="3657600"/>
-            <a:ext cx="7620000" cy="1524000"/>
+            <a:ext cx="3977639" cy="1524000"/>
           </a:xfrm>
           <a:prstGeom xmlns:a="http://schemas.openxmlformats.org/drawingml/2006/main" prst="rect">
             <a:avLst/>
@@ -9495,7 +9761,7 @@
                 <a:ea typeface="Calibri"/>
                 <a:cs typeface="Calibri"/>
               </a:rPr>
-              <a:t>1. ΔU = 12 − 10 = 2 V.</a:t>
+              <a:t>1. ΔU = 12 − 10 = 2 V.</a:t>
             </a:r>
           </a:p>
           <a:p xmlns:a="http://schemas.openxmlformats.org/drawingml/2006/main">
@@ -9518,7 +9784,40 @@
                 <a:ea typeface="Calibri"/>
                 <a:cs typeface="Calibri"/>
               </a:rPr>
-              <a:t>2. Rextra = 2/2 = 1 Ω.</a:t>
+              <a:t>2. </a:t>
+            </a:r>
+            <a:r>
+              <a:rPr sz="2063" b="0">
+                <a:solidFill>
+                  <a:srgbClr val="111111"/>
+                </a:solidFill>
+                <a:latin typeface="Calibri"/>
+                <a:ea typeface="Calibri"/>
+                <a:cs typeface="Calibri"/>
+              </a:rPr>
+              <a:t>R</a:t>
+            </a:r>
+            <a:r>
+              <a:rPr sz="2063" b="0" baseline="-25000">
+                <a:solidFill>
+                  <a:srgbClr val="111111"/>
+                </a:solidFill>
+                <a:latin typeface="Calibri"/>
+                <a:ea typeface="Calibri"/>
+                <a:cs typeface="Calibri"/>
+              </a:rPr>
+              <a:t>extra</a:t>
+            </a:r>
+            <a:r>
+              <a:rPr sz="2063" b="0">
+                <a:solidFill>
+                  <a:srgbClr val="111111"/>
+                </a:solidFill>
+                <a:latin typeface="Calibri"/>
+                <a:ea typeface="Calibri"/>
+                <a:cs typeface="Calibri"/>
+              </a:rPr>
+              <a:t> = 2/2 = 1 Ω.</a:t>
             </a:r>
           </a:p>
           <a:p xmlns:a="http://schemas.openxmlformats.org/drawingml/2006/main">
@@ -9541,7 +9840,7 @@
                 <a:ea typeface="Calibri"/>
                 <a:cs typeface="Calibri"/>
               </a:rPr>
-              <a:t>3. P = 2² · 1 = 4 W i den extra resistansen.</a:t>
+              <a:t>3. P = 2² · 1 = 4 W i den extra resistansen.</a:t>
             </a:r>
           </a:p>
         </p:txBody>
@@ -9563,7 +9862,7 @@
         <p:spPr>
           <a:xfrm xmlns:a="http://schemas.openxmlformats.org/drawingml/2006/main">
             <a:off x="762000" y="5372100"/>
-            <a:ext cx="7620000" cy="685800"/>
+            <a:ext cx="3977639" cy="685800"/>
           </a:xfrm>
           <a:prstGeom xmlns:a="http://schemas.openxmlformats.org/drawingml/2006/main" prst="rect">
             <a:avLst/>
@@ -9590,15 +9889,15 @@
               </a:defRPr>
             </a:pPr>
             <a:r>
-              <a:rPr sz="1913" b="0">
-                <a:solidFill>
-                  <a:srgbClr val="111111"/>
-                </a:solidFill>
-                <a:latin typeface="Calibri"/>
-                <a:ea typeface="Calibri"/>
-                <a:cs typeface="Calibri"/>
-              </a:rPr>
-              <a:t>Kontroll: ΔU · I = 2 · 2 = 4 W. Tomgång kan dölja fallet eftersom strömmen då är liten.</a:t>
+              <a:rPr sz="1550" b="0">
+                <a:solidFill>
+                  <a:srgbClr val="111111"/>
+                </a:solidFill>
+                <a:latin typeface="Calibri"/>
+                <a:ea typeface="Calibri"/>
+                <a:cs typeface="Calibri"/>
+              </a:rPr>
+              <a:t>Kontroll: ΔU · I = 2 · 2 = 4 W. Tomgång kan dölja fallet eftersom strömmen då är liten.</a:t>
             </a:r>
           </a:p>
         </p:txBody>
@@ -9660,6 +9959,30 @@
           </a:p>
         </p:txBody>
       </p:sp>
+      <p:pic xmlns:a="http://schemas.openxmlformats.org/drawingml/2006/main" xmlns:r="http://schemas.openxmlformats.org/officeDocument/2006/relationships">
+        <p:nvPicPr>
+          <p:cNvPr id="16" name="Figur: 12 V-källa, extra serieresistans 1 ohm o" descr="12 V-källa, extra serieresistans 1 ohm och last med 10 V vid 2 A"/>
+          <p:cNvPicPr>
+            <a:picLocks noChangeAspect="1"/>
+          </p:cNvPicPr>
+          <p:nvPr/>
+        </p:nvPicPr>
+        <p:blipFill>
+          <a:blip r:embed="rId3"/>
+          <a:stretch>
+            <a:fillRect/>
+          </a:stretch>
+        </p:blipFill>
+        <p:spPr>
+          <a:xfrm>
+            <a:off x="4892040" y="1645920"/>
+            <a:ext cx="3886200" cy="2709112"/>
+          </a:xfrm>
+          <a:prstGeom prst="rect">
+            <a:avLst/>
+          </a:prstGeom>
+        </p:spPr>
+      </p:pic>
     </p:spTree>
     <p:extLst>
       <p:ext uri="{BB962C8B-B14F-4D97-AF65-F5344CB8AC3E}">
@@ -10539,7 +10862,106 @@
                 <a:ea typeface="Calibri"/>
                 <a:cs typeface="Calibri"/>
               </a:rPr>
-              <a:t>ΔU = Ukälla − Ulast     Rextra = ΔU/I</a:t>
+              <a:t>ΔU = </a:t>
+            </a:r>
+            <a:r>
+              <a:rPr sz="2400" b="1">
+                <a:solidFill>
+                  <a:srgbClr val="064F91"/>
+                </a:solidFill>
+                <a:latin typeface="Calibri"/>
+                <a:ea typeface="Calibri"/>
+                <a:cs typeface="Calibri"/>
+              </a:rPr>
+              <a:t>U</a:t>
+            </a:r>
+            <a:r>
+              <a:rPr sz="2400" b="1" baseline="-25000">
+                <a:solidFill>
+                  <a:srgbClr val="064F91"/>
+                </a:solidFill>
+                <a:latin typeface="Calibri"/>
+                <a:ea typeface="Calibri"/>
+                <a:cs typeface="Calibri"/>
+              </a:rPr>
+              <a:t>källa</a:t>
+            </a:r>
+            <a:r>
+              <a:rPr sz="2400" b="1">
+                <a:solidFill>
+                  <a:srgbClr val="064F91"/>
+                </a:solidFill>
+                <a:latin typeface="Calibri"/>
+                <a:ea typeface="Calibri"/>
+                <a:cs typeface="Calibri"/>
+              </a:rPr>
+              <a:t> − </a:t>
+            </a:r>
+            <a:r>
+              <a:rPr sz="2400" b="1">
+                <a:solidFill>
+                  <a:srgbClr val="064F91"/>
+                </a:solidFill>
+                <a:latin typeface="Calibri"/>
+                <a:ea typeface="Calibri"/>
+                <a:cs typeface="Calibri"/>
+              </a:rPr>
+              <a:t>U</a:t>
+            </a:r>
+            <a:r>
+              <a:rPr sz="2400" b="1" baseline="-25000">
+                <a:solidFill>
+                  <a:srgbClr val="064F91"/>
+                </a:solidFill>
+                <a:latin typeface="Calibri"/>
+                <a:ea typeface="Calibri"/>
+                <a:cs typeface="Calibri"/>
+              </a:rPr>
+              <a:t>last</a:t>
+            </a:r>
+            <a:r>
+              <a:rPr sz="2400" b="1">
+                <a:solidFill>
+                  <a:srgbClr val="064F91"/>
+                </a:solidFill>
+                <a:latin typeface="Calibri"/>
+                <a:ea typeface="Calibri"/>
+                <a:cs typeface="Calibri"/>
+              </a:rPr>
+              <a:t>     </a:t>
+            </a:r>
+            <a:r>
+              <a:rPr sz="2400" b="1">
+                <a:solidFill>
+                  <a:srgbClr val="064F91"/>
+                </a:solidFill>
+                <a:latin typeface="Calibri"/>
+                <a:ea typeface="Calibri"/>
+                <a:cs typeface="Calibri"/>
+              </a:rPr>
+              <a:t>R</a:t>
+            </a:r>
+            <a:r>
+              <a:rPr sz="2400" b="1" baseline="-25000">
+                <a:solidFill>
+                  <a:srgbClr val="064F91"/>
+                </a:solidFill>
+                <a:latin typeface="Calibri"/>
+                <a:ea typeface="Calibri"/>
+                <a:cs typeface="Calibri"/>
+              </a:rPr>
+              <a:t>extra</a:t>
+            </a:r>
+            <a:r>
+              <a:rPr sz="2400" b="1">
+                <a:solidFill>
+                  <a:srgbClr val="064F91"/>
+                </a:solidFill>
+                <a:latin typeface="Calibri"/>
+                <a:ea typeface="Calibri"/>
+                <a:cs typeface="Calibri"/>
+              </a:rPr>
+              <a:t> = ΔU/I</a:t>
             </a:r>
           </a:p>
         </p:txBody>
@@ -10653,7 +11075,40 @@
                 <a:ea typeface="Calibri"/>
                 <a:cs typeface="Calibri"/>
               </a:rPr>
-              <a:t>Förutsättningar: Källan håller 24 V under last. Ulast = 18 V och I = 3 A. Övriga seriefall försummas.</a:t>
+              <a:t>Förutsättningar: Källan håller 24 V under last. </a:t>
+            </a:r>
+            <a:r>
+              <a:rPr sz="2025" b="0">
+                <a:solidFill>
+                  <a:srgbClr val="111111"/>
+                </a:solidFill>
+                <a:latin typeface="Calibri"/>
+                <a:ea typeface="Calibri"/>
+                <a:cs typeface="Calibri"/>
+              </a:rPr>
+              <a:t>U</a:t>
+            </a:r>
+            <a:r>
+              <a:rPr sz="2025" b="0" baseline="-25000">
+                <a:solidFill>
+                  <a:srgbClr val="111111"/>
+                </a:solidFill>
+                <a:latin typeface="Calibri"/>
+                <a:ea typeface="Calibri"/>
+                <a:cs typeface="Calibri"/>
+              </a:rPr>
+              <a:t>last</a:t>
+            </a:r>
+            <a:r>
+              <a:rPr sz="2025" b="0">
+                <a:solidFill>
+                  <a:srgbClr val="111111"/>
+                </a:solidFill>
+                <a:latin typeface="Calibri"/>
+                <a:ea typeface="Calibri"/>
+                <a:cs typeface="Calibri"/>
+              </a:rPr>
+              <a:t> = 18 V och I = 3 A. Övriga seriefall försummas.</a:t>
             </a:r>
           </a:p>
         </p:txBody>
@@ -10951,7 +11406,7 @@
         <p:spPr>
           <a:xfrm xmlns:a="http://schemas.openxmlformats.org/drawingml/2006/main">
             <a:off x="762000" y="2533650"/>
-            <a:ext cx="7620000" cy="2286000"/>
+            <a:ext cx="3886200" cy="2606040"/>
           </a:xfrm>
           <a:prstGeom xmlns:a="http://schemas.openxmlformats.org/drawingml/2006/main" prst="rect">
             <a:avLst/>
@@ -10987,7 +11442,7 @@
                 <a:ea typeface="Calibri"/>
                 <a:cs typeface="Calibri"/>
               </a:rPr>
-              <a:t>Matningen mäts till 24 V utan last men bara 18 V vid lasten när strömmen är 3 A. Källans anslutningar ligger kvar på 24 V. Beräkna extra serieresistans.</a:t>
+              <a:t>Matningen mäts till 24 V utan last men bara 18 V vid lasten när strömmen är 3 A. Källans anslutningar ligger kvar på 24 V. Beräkna extra serieresistans.</a:t>
             </a:r>
           </a:p>
         </p:txBody>
@@ -11108,6 +11563,30 @@
           </a:p>
         </p:txBody>
       </p:sp>
+      <p:pic xmlns:a="http://schemas.openxmlformats.org/drawingml/2006/main" xmlns:r="http://schemas.openxmlformats.org/officeDocument/2006/relationships">
+        <p:nvPicPr>
+          <p:cNvPr id="9" name="Figur: Källan håller 24 V, lasten får 18 V vid " descr="Källan håller 24 V, lasten får 18 V vid 3 A; den extra serieresistansen okänd"/>
+          <p:cNvPicPr>
+            <a:picLocks noChangeAspect="1"/>
+          </p:cNvPicPr>
+          <p:nvPr/>
+        </p:nvPicPr>
+        <p:blipFill>
+          <a:blip r:embed="rId3"/>
+          <a:stretch>
+            <a:fillRect/>
+          </a:stretch>
+        </p:blipFill>
+        <p:spPr>
+          <a:xfrm>
+            <a:off x="4846320" y="2331720"/>
+            <a:ext cx="3931920" cy="2740984"/>
+          </a:xfrm>
+          <a:prstGeom prst="rect">
+            <a:avLst/>
+          </a:prstGeom>
+        </p:spPr>
+      </p:pic>
     </p:spTree>
     <p:extLst>
       <p:ext uri="{BB962C8B-B14F-4D97-AF65-F5344CB8AC3E}">
@@ -11320,7 +11799,7 @@
                 <a:ea typeface="Calibri"/>
                 <a:cs typeface="Calibri"/>
               </a:rPr>
-              <a:t>Bristande källmatning påverkar matningen under belastning. En bruten hållväg visar sig särskilt efter START-släpp.</a:t>
+              <a:t>Vad förutsäger varje hypotes för källspänningen och spolspänningen, under START och efter släpp?</a:t>
             </a:r>
           </a:p>
         </p:txBody>
@@ -14437,64 +14916,6 @@
       </p:sp>
       <p:sp>
         <p:nvSpPr>
-          <p:cNvPr id="7" name="Källor och lärarstöd finns även i bildanteckningarna.">
-            <a:extLst xmlns:a="http://schemas.openxmlformats.org/drawingml/2006/main">
-              <a:ext uri="{FF2B5EF4-FFF2-40B4-BE49-F238E27FC236}">
-                <a16:creationId xmlns:a16="http://schemas.microsoft.com/office/drawing/2014/main" id="{B5ABF4AF-B1B4-49C4-A5A6-3CA9C29726B7}"/>
-              </a:ext>
-            </a:extLst>
-          </p:cNvPr>
-          <p:cNvSpPr>
-            <a:spLocks xmlns:a="http://schemas.openxmlformats.org/drawingml/2006/main" noGrp="1"/>
-          </p:cNvSpPr>
-          <p:nvPr/>
-        </p:nvSpPr>
-        <p:spPr>
-          <a:xfrm xmlns:a="http://schemas.openxmlformats.org/drawingml/2006/main">
-            <a:off x="762000" y="5676900"/>
-            <a:ext cx="7620000" cy="352425"/>
-          </a:xfrm>
-          <a:prstGeom xmlns:a="http://schemas.openxmlformats.org/drawingml/2006/main" prst="rect">
-            <a:avLst/>
-          </a:prstGeom>
-          <a:noFill xmlns:a="http://schemas.openxmlformats.org/drawingml/2006/main"/>
-          <a:ln xmlns:a="http://schemas.openxmlformats.org/drawingml/2006/main" w="0">
-            <a:noFill/>
-          </a:ln>
-        </p:spPr>
-        <p:txBody>
-          <a:bodyPr xmlns:a="http://schemas.openxmlformats.org/drawingml/2006/main" wrap="square" lIns="0" tIns="0" rIns="0" bIns="0" anchor="t">
-            <a:noAutofit/>
-          </a:bodyPr>
-          <a:lstStyle xmlns:a="http://schemas.openxmlformats.org/drawingml/2006/main"/>
-          <a:p xmlns:a="http://schemas.openxmlformats.org/drawingml/2006/main">
-            <a:pPr algn="l">
-              <a:buNone/>
-              <a:defRPr sz="1800" b="0">
-                <a:solidFill>
-                  <a:srgbClr val="111111"/>
-                </a:solidFill>
-                <a:latin typeface="Calibri"/>
-                <a:ea typeface="Calibri"/>
-                <a:cs typeface="Calibri"/>
-              </a:defRPr>
-            </a:pPr>
-            <a:r>
-              <a:rPr sz="1800" b="0">
-                <a:solidFill>
-                  <a:srgbClr val="111111"/>
-                </a:solidFill>
-                <a:latin typeface="Calibri"/>
-                <a:ea typeface="Calibri"/>
-                <a:cs typeface="Calibri"/>
-              </a:rPr>
-              <a:t>Källor och lärarstöd finns även i bildanteckningarna.</a:t>
-            </a:r>
-          </a:p>
-        </p:txBody>
-      </p:sp>
-      <p:sp>
-        <p:nvSpPr>
           <p:cNvPr id="8" name="22">
             <a:extLst xmlns:a="http://schemas.openxmlformats.org/drawingml/2006/main">
               <a:ext uri="{FF2B5EF4-FFF2-40B4-BE49-F238E27FC236}">
@@ -16353,7 +16774,7 @@
         <p:spPr>
           <a:xfrm xmlns:a="http://schemas.openxmlformats.org/drawingml/2006/main">
             <a:off x="762000" y="1619250"/>
-            <a:ext cx="7620000" cy="1466850"/>
+            <a:ext cx="3977639" cy="1466850"/>
           </a:xfrm>
           <a:prstGeom xmlns:a="http://schemas.openxmlformats.org/drawingml/2006/main" prst="rect">
             <a:avLst/>
@@ -16381,7 +16802,7 @@
               </a:defRPr>
             </a:pPr>
             <a:r>
-              <a:rPr sz="2400" b="0">
+              <a:rPr sz="1900" b="0">
                 <a:solidFill>
                   <a:srgbClr val="111111"/>
                 </a:solidFill>
@@ -16405,7 +16826,7 @@
               </a:defRPr>
             </a:pPr>
             <a:r>
-              <a:rPr sz="2400" b="0">
+              <a:rPr sz="1900" b="0">
                 <a:solidFill>
                   <a:srgbClr val="111111"/>
                 </a:solidFill>
@@ -16435,7 +16856,7 @@
         <p:spPr>
           <a:xfrm xmlns:a="http://schemas.openxmlformats.org/drawingml/2006/main">
             <a:off x="762000" y="3200400"/>
-            <a:ext cx="7620000" cy="838200"/>
+            <a:ext cx="3977639" cy="838200"/>
           </a:xfrm>
           <a:prstGeom xmlns:a="http://schemas.openxmlformats.org/drawingml/2006/main" prst="rect">
             <a:avLst/>
@@ -16463,7 +16884,7 @@
               </a:defRPr>
             </a:pPr>
             <a:r>
-              <a:rPr sz="2925" b="1">
+              <a:rPr sz="2650" b="1">
                 <a:solidFill>
                   <a:srgbClr val="064F91"/>
                 </a:solidFill>
@@ -16493,7 +16914,7 @@
         <p:spPr>
           <a:xfrm xmlns:a="http://schemas.openxmlformats.org/drawingml/2006/main">
             <a:off x="762000" y="4429125"/>
-            <a:ext cx="7620000" cy="1352550"/>
+            <a:ext cx="3977639" cy="1352550"/>
           </a:xfrm>
           <a:prstGeom xmlns:a="http://schemas.openxmlformats.org/drawingml/2006/main" prst="rect">
             <a:avLst/>
@@ -16521,7 +16942,7 @@
               </a:defRPr>
             </a:pPr>
             <a:r>
-              <a:rPr sz="2250" b="0">
+              <a:rPr sz="1900" b="0">
                 <a:solidFill>
                   <a:srgbClr val="111111"/>
                 </a:solidFill>
@@ -16545,7 +16966,7 @@
               </a:defRPr>
             </a:pPr>
             <a:r>
-              <a:rPr sz="2250" b="0">
+              <a:rPr sz="1900" b="0">
                 <a:solidFill>
                   <a:srgbClr val="111111"/>
                 </a:solidFill>
@@ -16616,6 +17037,30 @@
           </a:p>
         </p:txBody>
       </p:sp>
+      <p:pic xmlns:a="http://schemas.openxmlformats.org/drawingml/2006/main" xmlns:r="http://schemas.openxmlformats.org/officeDocument/2006/relationships">
+        <p:nvPicPr>
+          <p:cNvPr id="9" name="Figur: Matningskedja med mätpunkterna A till E " descr="Matningskedja med mätpunkterna A till E mellan källa och last; den första mätningen görs i mitten vid C"/>
+          <p:cNvPicPr>
+            <a:picLocks noChangeAspect="1"/>
+          </p:cNvPicPr>
+          <p:nvPr/>
+        </p:nvPicPr>
+        <p:blipFill>
+          <a:blip r:embed="rId3"/>
+          <a:stretch>
+            <a:fillRect/>
+          </a:stretch>
+        </p:blipFill>
+        <p:spPr>
+          <a:xfrm>
+            <a:off x="4892040" y="1645920"/>
+            <a:ext cx="3886200" cy="2528021"/>
+          </a:xfrm>
+          <a:prstGeom prst="rect">
+            <a:avLst/>
+          </a:prstGeom>
+        </p:spPr>
+      </p:pic>
     </p:spTree>
     <p:extLst>
       <p:ext uri="{BB962C8B-B14F-4D97-AF65-F5344CB8AC3E}">

--- a/sjoskolan/vecka-45/aktuell/v45_01_Systematisk_felsokning_elev.pptx
+++ b/sjoskolan/vecka-45/aktuell/v45_01_Systematisk_felsokning_elev.pptx
@@ -3512,6 +3512,10 @@
             <a:noFill/>
           </a:ln>
         </p:spPr>
+        <p:txBody xmlns:a="http://schemas.openxmlformats.org/drawingml/2006/main">
+          <a:bodyPr/>
+          <a:p/>
+        </p:txBody>
       </p:sp>
       <p:sp>
         <p:nvSpPr>
@@ -5404,7 +5408,7 @@
                 <a:ea typeface="Calibri"/>
                 <a:cs typeface="Calibri"/>
               </a:rPr>
-              <a:t>Förutsättningar: B har 24 V. Lastens pluspunkt har 0 V mot hel retur. En enkel kedja och samma referens antas.</a:t>
+              <a:t>Förutsättningar: Källan har 24 V. B har 0 V mot hel retur. En enkel kedja och samma referens antas.</a:t>
             </a:r>
           </a:p>
         </p:txBody>
@@ -5738,7 +5742,7 @@
                 <a:ea typeface="Calibri"/>
                 <a:cs typeface="Calibri"/>
               </a:rPr>
-              <a:t>En enkel 24 V-matningskedja har normal spänning vid punkt B i mitten. Lastens pluspunkt har 0 V mot hel retur. Vilken del prioriteras?</a:t>
+              <a:t>Källan visar 24 V men punkt B i mitten har 0 V mot hel retur. Vilken del prioriteras?</a:t>
             </a:r>
           </a:p>
         </p:txBody>
@@ -9704,7 +9708,29 @@
                 <a:ea typeface="Calibri"/>
                 <a:cs typeface="Calibri"/>
               </a:rPr>
-              <a:t>)/I     P = I²Rextra</a:t>
+              <a:t>)/I     P = I² · </a:t>
+            </a:r>
+            <a:r>
+              <a:rPr sz="2325" b="1">
+                <a:solidFill>
+                  <a:srgbClr val="064F91"/>
+                </a:solidFill>
+                <a:latin typeface="Calibri"/>
+                <a:ea typeface="Calibri"/>
+                <a:cs typeface="Calibri"/>
+              </a:rPr>
+              <a:t>R</a:t>
+            </a:r>
+            <a:r>
+              <a:rPr sz="2325" b="1" baseline="-25000">
+                <a:solidFill>
+                  <a:srgbClr val="064F91"/>
+                </a:solidFill>
+                <a:latin typeface="Calibri"/>
+                <a:ea typeface="Calibri"/>
+                <a:cs typeface="Calibri"/>
+              </a:rPr>
+              <a:t>extra</a:t>
             </a:r>
           </a:p>
         </p:txBody>
@@ -17039,7 +17065,7 @@
       </p:sp>
       <p:pic xmlns:a="http://schemas.openxmlformats.org/drawingml/2006/main" xmlns:r="http://schemas.openxmlformats.org/officeDocument/2006/relationships">
         <p:nvPicPr>
-          <p:cNvPr id="9" name="Figur: Matningskedja med mätpunkterna A till E " descr="Matningskedja med mätpunkterna A till E mellan källa och last; den första mätningen görs i mitten vid C"/>
+          <p:cNvPr id="9" name="Figur: Matningskedja med mätpunkterna A till E " descr="Matningskedja med mätpunkterna A till E mellan källa och last; den första mätningen görs i mitten vid C och avgör vilken halva som undersöks"/>
           <p:cNvPicPr>
             <a:picLocks noChangeAspect="1"/>
           </p:cNvPicPr>

--- a/sjoskolan/vecka-45/aktuell/v45_01_Systematisk_felsokning_elev.pptx
+++ b/sjoskolan/vecka-45/aktuell/v45_01_Systematisk_felsokning_elev.pptx
@@ -3903,7 +3903,7 @@
                 <a:ea typeface="Calibri"/>
                 <a:cs typeface="Calibri"/>
               </a:rPr>
-              <a:t>En hypotes föreslår en orsak. Den måste prövas med information som kan stödja eller försvaga den.</a:t>
+              <a:t>En hypotes är en föreslagen orsak som måste prövas.</a:t>
             </a:r>
           </a:p>
         </p:txBody>
@@ -3960,7 +3960,7 @@
                 <a:ea typeface="Calibri"/>
                 <a:cs typeface="Calibri"/>
               </a:rPr>
-              <a:t>Förutsättningar: Rapporten innehåller ”motorn startar inte” och ”kontaktorn är trasig”. Ingen kontaktorprovning är redovisad.</a:t>
+              <a:t>Förutsättningar: Rapporten innehåller ”motorn startar inte” och ”kontaktorn är trasig”. Ingen har provat kontaktorn.</a:t>
             </a:r>
           </a:p>
         </p:txBody>
@@ -4017,7 +4017,7 @@
                 <a:ea typeface="Calibri"/>
                 <a:cs typeface="Calibri"/>
               </a:rPr>
-              <a:t>Arbetsgång: Avgör vilken text som beskriver symtom och vilken som tillskriver en orsak.</a:t>
+              <a:t>Arbetsgång: Avgör vilken mening som beskriver vad som hänt och vilken som gissar på en orsak.</a:t>
             </a:r>
           </a:p>
         </p:txBody>
@@ -4627,7 +4627,7 @@
                 <a:ea typeface="Calibri"/>
                 <a:cs typeface="Calibri"/>
               </a:rPr>
-              <a:t>Utebliven funktion kan bero på vilken del som helst av kedjan. Ett startkommando bevisar inte fungerande kraftmatning.</a:t>
+              <a:t>Felet kan sitta var som helst i kedjan, och ett startkommando bevisar inte att kraftmatningen fungerar.</a:t>
             </a:r>
           </a:p>
         </p:txBody>
@@ -4684,7 +4684,7 @@
                 <a:ea typeface="Calibri"/>
                 <a:cs typeface="Calibri"/>
               </a:rPr>
-              <a:t>Förutsättningar: Pumpen startar inte. Inga ytterligare observationer är givna.</a:t>
+              <a:t>Förutsättningar: Pumpen startar inte. Mer än så vet du inte.</a:t>
             </a:r>
           </a:p>
         </p:txBody>
@@ -4741,7 +4741,7 @@
                 <a:ea typeface="Calibri"/>
                 <a:cs typeface="Calibri"/>
               </a:rPr>
-              <a:t>Arbetsgång: Nämn minst fyra funktioner att avgränsa. Ange ett exempel på vad som behöver kontrolleras i någon av dem.</a:t>
+              <a:t>Arbetsgång: Nämn minst fyra funktioner och ge ett exempel på vad som ska kontrolleras i en av dem.</a:t>
             </a:r>
           </a:p>
         </p:txBody>
@@ -5018,7 +5018,7 @@
                 <a:ea typeface="Calibri"/>
                 <a:cs typeface="Calibri"/>
               </a:rPr>
-              <a:t>En pump startar inte. Nämn fyra funktioner att avgränsa innan en komponent döms ut.</a:t>
+              <a:t>En pump startar inte. Nämn fyra funktioner du behöver kontrollera innan du dömer ut någon komponent.</a:t>
             </a:r>
           </a:p>
         </p:txBody>
@@ -5351,7 +5351,7 @@
                 <a:ea typeface="Calibri"/>
                 <a:cs typeface="Calibri"/>
               </a:rPr>
-              <a:t>Rätt spänning vid en mellanpunkt ger stöd för delen före punkten i det aktuella driftfallet.</a:t>
+              <a:t>Rätt spänning i en mellanpunkt tyder på att delen före punkten fungerar.</a:t>
             </a:r>
           </a:p>
         </p:txBody>
@@ -5465,7 +5465,7 @@
                 <a:ea typeface="Calibri"/>
                 <a:cs typeface="Calibri"/>
               </a:rPr>
-              <a:t>Arbetsgång: Jämför punkterna och avgränsa sträckan där spänningen försvinner.</a:t>
+              <a:t>Arbetsgång: Jämför punkterna och ringa in sträckan där spänningen försvinner.</a:t>
             </a:r>
           </a:p>
         </p:txBody>
@@ -6063,7 +6063,18 @@
                 <a:ea typeface="Calibri"/>
                 <a:cs typeface="Calibri"/>
               </a:rPr>
-              <a:t> = R · I     </a:t>
+              <a:t> = R · I; Ukontakt = U</a:t>
+            </a:r>
+            <a:r>
+              <a:rPr sz="2400" b="1" baseline="-25000">
+                <a:solidFill>
+                  <a:srgbClr val="064F91"/>
+                </a:solidFill>
+                <a:latin typeface="Calibri"/>
+                <a:ea typeface="Calibri"/>
+                <a:cs typeface="Calibri"/>
+              </a:rPr>
+              <a:t>källa</a:t>
             </a:r>
             <a:r>
               <a:rPr sz="2400" b="1">
@@ -6074,73 +6085,7 @@
                 <a:ea typeface="Calibri"/>
                 <a:cs typeface="Calibri"/>
               </a:rPr>
-              <a:t>U</a:t>
-            </a:r>
-            <a:r>
-              <a:rPr sz="2400" b="1" baseline="-25000">
-                <a:solidFill>
-                  <a:srgbClr val="064F91"/>
-                </a:solidFill>
-                <a:latin typeface="Calibri"/>
-                <a:ea typeface="Calibri"/>
-                <a:cs typeface="Calibri"/>
-              </a:rPr>
-              <a:t>kontakt</a:t>
-            </a:r>
-            <a:r>
-              <a:rPr sz="2400" b="1">
-                <a:solidFill>
-                  <a:srgbClr val="064F91"/>
-                </a:solidFill>
-                <a:latin typeface="Calibri"/>
-                <a:ea typeface="Calibri"/>
-                <a:cs typeface="Calibri"/>
-              </a:rPr>
-              <a:t> = </a:t>
-            </a:r>
-            <a:r>
-              <a:rPr sz="2400" b="1">
-                <a:solidFill>
-                  <a:srgbClr val="064F91"/>
-                </a:solidFill>
-                <a:latin typeface="Calibri"/>
-                <a:ea typeface="Calibri"/>
-                <a:cs typeface="Calibri"/>
-              </a:rPr>
-              <a:t>U</a:t>
-            </a:r>
-            <a:r>
-              <a:rPr sz="2400" b="1" baseline="-25000">
-                <a:solidFill>
-                  <a:srgbClr val="064F91"/>
-                </a:solidFill>
-                <a:latin typeface="Calibri"/>
-                <a:ea typeface="Calibri"/>
-                <a:cs typeface="Calibri"/>
-              </a:rPr>
-              <a:t>källa</a:t>
-            </a:r>
-            <a:r>
-              <a:rPr sz="2400" b="1">
-                <a:solidFill>
-                  <a:srgbClr val="064F91"/>
-                </a:solidFill>
-                <a:latin typeface="Calibri"/>
-                <a:ea typeface="Calibri"/>
-                <a:cs typeface="Calibri"/>
-              </a:rPr>
-              <a:t> − </a:t>
-            </a:r>
-            <a:r>
-              <a:rPr sz="2400" b="1">
-                <a:solidFill>
-                  <a:srgbClr val="064F91"/>
-                </a:solidFill>
-                <a:latin typeface="Calibri"/>
-                <a:ea typeface="Calibri"/>
-                <a:cs typeface="Calibri"/>
-              </a:rPr>
-              <a:t>U</a:t>
+              <a:t> − U</a:t>
             </a:r>
             <a:r>
               <a:rPr sz="2400" b="1" baseline="-25000">
@@ -6208,7 +6153,7 @@
                 <a:ea typeface="Calibri"/>
                 <a:cs typeface="Calibri"/>
               </a:rPr>
-              <a:t>En öppen kontakt hindrar strömmen. Utan ström får resistorn inget spänningsfall.</a:t>
+              <a:t>En öppen kontakt stoppar strömmen, och utan ström blir det ingen spänning över resistorn.</a:t>
             </a:r>
           </a:p>
         </p:txBody>
@@ -6265,7 +6210,7 @@
                 <a:ea typeface="Calibri"/>
                 <a:cs typeface="Calibri"/>
               </a:rPr>
-              <a:t>Förutsättningar: Ideal 24 V-källa, en resistor, en enda öppen kontakt och hel retur.</a:t>
+              <a:t>Förutsättningar: Ideal 24 V-källa, en resistor, en öppen kontakt och hel retur.</a:t>
             </a:r>
           </a:p>
         </p:txBody>
@@ -6322,7 +6267,7 @@
                 <a:ea typeface="Calibri"/>
                 <a:cs typeface="Calibri"/>
               </a:rPr>
-              <a:t>Arbetsgång: Räkna strömmen först. Använd därefter slinglagen för spänningen över öppningen.</a:t>
+              <a:t>Arbetsgång: Räkna först strömmen och använd sedan spänningslagen för spänningen över kontakten.</a:t>
             </a:r>
           </a:p>
         </p:txBody>
@@ -6599,7 +6544,7 @@
                 <a:ea typeface="Calibri"/>
                 <a:cs typeface="Calibri"/>
               </a:rPr>
-              <a:t>24 V matar en resistor via en enda öppen kontakt. Returen är hel. Vilken ström går, och vilken ideal spänning ligger över kontakten?</a:t>
+              <a:t>24 V matar en resistor genom en enda kontakt, som står öppen. Returen är hel. Vilken ström går, och vilken spänning ligger över kontakten (idealt)?</a:t>
             </a:r>
           </a:p>
         </p:txBody>
@@ -7000,7 +6945,7 @@
                 <a:ea typeface="Calibri"/>
                 <a:cs typeface="Calibri"/>
               </a:rPr>
-              <a:t> omfattar hela den oavsiktliga strömvägen i modellen. V/Ω ger A.</a:t>
+              <a:t> är resistansen i hela den oavsiktliga strömvägen. V/Ω ger A.</a:t>
             </a:r>
           </a:p>
         </p:txBody>
@@ -7057,7 +7002,7 @@
                 <a:ea typeface="Calibri"/>
                 <a:cs typeface="Calibri"/>
               </a:rPr>
-              <a:t>Förutsättningar: Ideal 24 V-källa och total resistans 0,10 Ω. Ingen strömbegränsning ingår i räkneförutsättningen.</a:t>
+              <a:t>Förutsättningar: Ideal 24 V-källa och total resistans 0,10 Ω. Inget begränsar strömmen i beräkningen.</a:t>
             </a:r>
           </a:p>
         </p:txBody>
@@ -7114,7 +7059,7 @@
                 <a:ea typeface="Calibri"/>
                 <a:cs typeface="Calibri"/>
               </a:rPr>
-              <a:t>Arbetsgång: Beräkna modellströmmen. Ange sedan att verklig källimpedans och skydd påverkar förloppet.</a:t>
+              <a:t>Arbetsgång: Räkna ut strömmen och förklara att källans verkliga inre resistans och skydden påverkar vad som händer.</a:t>
             </a:r>
           </a:p>
         </p:txBody>
@@ -7333,7 +7278,7 @@
                 <a:ea typeface="Calibri"/>
                 <a:cs typeface="Calibri"/>
               </a:rPr>
-              <a:t>Felström i modell</a:t>
+              <a:t>Felström i en förenklad beräkning</a:t>
             </a:r>
           </a:p>
         </p:txBody>
@@ -7391,7 +7336,7 @@
                 <a:ea typeface="Calibri"/>
                 <a:cs typeface="Calibri"/>
               </a:rPr>
-              <a:t>En 24 V ideal källa får en oavsiktlig väg med total R = 0,10 Ω. Beräkna modellens ström och ange en begränsning.</a:t>
+              <a:t>En ideal 24 V-källa kortsluts av misstag genom en väg med den totala resistansen R = 0,10 Ω. Beräkna strömmen och ange varför svaret bara är en uppskattning.</a:t>
             </a:r>
           </a:p>
         </p:txBody>
@@ -10164,7 +10109,7 @@
                 <a:ea typeface="Calibri"/>
                 <a:cs typeface="Calibri"/>
               </a:rPr>
-              <a:t>ΔU = I · R     P = I²R</a:t>
+              <a:t>ΔU = I · R; P = I² · R</a:t>
             </a:r>
           </a:p>
         </p:txBody>
@@ -10278,7 +10223,7 @@
                 <a:ea typeface="Calibri"/>
                 <a:cs typeface="Calibri"/>
               </a:rPr>
-              <a:t>Förutsättningar: R = 0,20 Ω och I = 10 A vid samma driftfall.</a:t>
+              <a:t>Förutsättningar: R = 0,20 Ω och I = 10 A vid samma tillfälle.</a:t>
             </a:r>
           </a:p>
         </p:txBody>
@@ -10612,7 +10557,7 @@
                 <a:ea typeface="Calibri"/>
                 <a:cs typeface="Calibri"/>
               </a:rPr>
-              <a:t>En anslutning har R = 0,20 Ω och I = 10 A. Beräkna spänningsfall och värmeeffekt.</a:t>
+              <a:t>En anslutning har R = 0,20 Ω och I = 10 A. Beräkna spänningsfallet och värmeeffekten.</a:t>
             </a:r>
           </a:p>
         </p:txBody>
@@ -10888,7 +10833,18 @@
                 <a:ea typeface="Calibri"/>
                 <a:cs typeface="Calibri"/>
               </a:rPr>
-              <a:t>ΔU = </a:t>
+              <a:t>ΔU = U</a:t>
+            </a:r>
+            <a:r>
+              <a:rPr sz="2400" b="1" baseline="-25000">
+                <a:solidFill>
+                  <a:srgbClr val="064F91"/>
+                </a:solidFill>
+                <a:latin typeface="Calibri"/>
+                <a:ea typeface="Calibri"/>
+                <a:cs typeface="Calibri"/>
+              </a:rPr>
+              <a:t>källa</a:t>
             </a:r>
             <a:r>
               <a:rPr sz="2400" b="1">
@@ -10899,7 +10855,7 @@
                 <a:ea typeface="Calibri"/>
                 <a:cs typeface="Calibri"/>
               </a:rPr>
-              <a:t>U</a:t>
+              <a:t> − U</a:t>
             </a:r>
             <a:r>
               <a:rPr sz="2400" b="1" baseline="-25000">
@@ -10910,7 +10866,7 @@
                 <a:ea typeface="Calibri"/>
                 <a:cs typeface="Calibri"/>
               </a:rPr>
-              <a:t>källa</a:t>
+              <a:t>last</a:t>
             </a:r>
             <a:r>
               <a:rPr sz="2400" b="1">
@@ -10921,51 +10877,7 @@
                 <a:ea typeface="Calibri"/>
                 <a:cs typeface="Calibri"/>
               </a:rPr>
-              <a:t> − </a:t>
-            </a:r>
-            <a:r>
-              <a:rPr sz="2400" b="1">
-                <a:solidFill>
-                  <a:srgbClr val="064F91"/>
-                </a:solidFill>
-                <a:latin typeface="Calibri"/>
-                <a:ea typeface="Calibri"/>
-                <a:cs typeface="Calibri"/>
-              </a:rPr>
-              <a:t>U</a:t>
-            </a:r>
-            <a:r>
-              <a:rPr sz="2400" b="1" baseline="-25000">
-                <a:solidFill>
-                  <a:srgbClr val="064F91"/>
-                </a:solidFill>
-                <a:latin typeface="Calibri"/>
-                <a:ea typeface="Calibri"/>
-                <a:cs typeface="Calibri"/>
-              </a:rPr>
-              <a:t>last</a:t>
-            </a:r>
-            <a:r>
-              <a:rPr sz="2400" b="1">
-                <a:solidFill>
-                  <a:srgbClr val="064F91"/>
-                </a:solidFill>
-                <a:latin typeface="Calibri"/>
-                <a:ea typeface="Calibri"/>
-                <a:cs typeface="Calibri"/>
-              </a:rPr>
-              <a:t>     </a:t>
-            </a:r>
-            <a:r>
-              <a:rPr sz="2400" b="1">
-                <a:solidFill>
-                  <a:srgbClr val="064F91"/>
-                </a:solidFill>
-                <a:latin typeface="Calibri"/>
-                <a:ea typeface="Calibri"/>
-                <a:cs typeface="Calibri"/>
-              </a:rPr>
-              <a:t>R</a:t>
+              <a:t>; R</a:t>
             </a:r>
             <a:r>
               <a:rPr sz="2400" b="1" baseline="-25000">
@@ -11044,7 +10956,7 @@
                 <a:ea typeface="Calibri"/>
                 <a:cs typeface="Calibri"/>
               </a:rPr>
-              <a:t>Den beräknade resistansen avser summan av de förlustvägar som ligger mellan mätpunkterna.</a:t>
+              <a:t>Resistansen du får fram är all resistans mellan mätpunkterna tillsammans.</a:t>
             </a:r>
           </a:p>
         </p:txBody>
@@ -11101,7 +11013,18 @@
                 <a:ea typeface="Calibri"/>
                 <a:cs typeface="Calibri"/>
               </a:rPr>
-              <a:t>Förutsättningar: Källan håller 24 V under last. </a:t>
+              <a:t>Förutsättningar: Källan håller 24 V under last. U</a:t>
+            </a:r>
+            <a:r>
+              <a:rPr sz="2025" b="0" baseline="-25000">
+                <a:solidFill>
+                  <a:srgbClr val="111111"/>
+                </a:solidFill>
+                <a:latin typeface="Calibri"/>
+                <a:ea typeface="Calibri"/>
+                <a:cs typeface="Calibri"/>
+              </a:rPr>
+              <a:t>last</a:t>
             </a:r>
             <a:r>
               <a:rPr sz="2025" b="0">
@@ -11112,29 +11035,7 @@
                 <a:ea typeface="Calibri"/>
                 <a:cs typeface="Calibri"/>
               </a:rPr>
-              <a:t>U</a:t>
-            </a:r>
-            <a:r>
-              <a:rPr sz="2025" b="0" baseline="-25000">
-                <a:solidFill>
-                  <a:srgbClr val="111111"/>
-                </a:solidFill>
-                <a:latin typeface="Calibri"/>
-                <a:ea typeface="Calibri"/>
-                <a:cs typeface="Calibri"/>
-              </a:rPr>
-              <a:t>last</a:t>
-            </a:r>
-            <a:r>
-              <a:rPr sz="2025" b="0">
-                <a:solidFill>
-                  <a:srgbClr val="111111"/>
-                </a:solidFill>
-                <a:latin typeface="Calibri"/>
-                <a:ea typeface="Calibri"/>
-                <a:cs typeface="Calibri"/>
-              </a:rPr>
-              <a:t> = 18 V och I = 3 A. Övriga seriefall försummas.</a:t>
+              <a:t> = 18 V och I = 3 A. Andra spänningsfall försummas.</a:t>
             </a:r>
           </a:p>
         </p:txBody>
@@ -11191,7 +11092,7 @@
                 <a:ea typeface="Calibri"/>
                 <a:cs typeface="Calibri"/>
               </a:rPr>
-              <a:t>Arbetsgång: Använd de samtidiga värdena under last. Beräkna fallet och dividera med strömmen.</a:t>
+              <a:t>Arbetsgång: Använd värdena som mättes samtidigt under last. Räkna ut spänningsfallet och dela med strömmen.</a:t>
             </a:r>
           </a:p>
         </p:txBody>
@@ -11468,7 +11369,7 @@
                 <a:ea typeface="Calibri"/>
                 <a:cs typeface="Calibri"/>
               </a:rPr>
-              <a:t>Matningen mäts till 24 V utan last men bara 18 V vid lasten när strömmen är 3 A. Källans anslutningar ligger kvar på 24 V. Beräkna extra serieresistans.</a:t>
+              <a:t>Matningen mäts till 24 V utan last men bara 18 V vid lasten när strömmen är 3 A. Vid källans anslutningar är det fortfarande 24 V. Beräkna den extra resistansen i serie.</a:t>
             </a:r>
           </a:p>
         </p:txBody>
@@ -11882,7 +11783,7 @@
                 <a:ea typeface="Calibri"/>
                 <a:cs typeface="Calibri"/>
               </a:rPr>
-              <a:t>Förutsättningar: K1 drar under START men släpper efteråt. Kontroller utförs enligt säker mätplan.</a:t>
+              <a:t>Förutsättningar: K1 drar när START hålls in men släpper efteråt. Kontrollerna görs enligt en säker mätplan.</a:t>
             </a:r>
           </a:p>
         </p:txBody>
@@ -12730,7 +12631,7 @@
                 <a:ea typeface="Calibri"/>
                 <a:cs typeface="Calibri"/>
               </a:rPr>
-              <a:t>K1 drar när START hålls inne och släpper när knappen släpps. Vilken kontroll skiljer hållvägsfel från generell matningsbrist?</a:t>
+              <a:t>K1 drar när START hålls inne och släpper när knappen släpps. Vilken kontroll kan visa om felet sitter i hållvägen eller om det är matningen som inte räcker?</a:t>
             </a:r>
           </a:p>
         </p:txBody>
@@ -13063,7 +12964,7 @@
                 <a:ea typeface="Calibri"/>
                 <a:cs typeface="Calibri"/>
               </a:rPr>
-              <a:t>Kontaktresistans kan ge stort fall först vid hög ström. Temperatur och tid kan ändra förloppet.</a:t>
+              <a:t>En dålig kontakt kan ge stort spänningsfall först vid hög ström, och temperatur och tid påverkar också.</a:t>
             </a:r>
           </a:p>
         </p:txBody>
@@ -13120,7 +13021,7 @@
                 <a:ea typeface="Calibri"/>
                 <a:cs typeface="Calibri"/>
               </a:rPr>
-              <a:t>Förutsättningar: Felet uppträder vid hög belastning och kan saknas vid tomgång.</a:t>
+              <a:t>Förutsättningar: Felet visar sig vid hög belastning men kanske inte utan last.</a:t>
             </a:r>
           </a:p>
         </p:txBody>
@@ -13177,7 +13078,7 @@
                 <a:ea typeface="Calibri"/>
                 <a:cs typeface="Calibri"/>
               </a:rPr>
-              <a:t>Arbetsgång: Ange samtidiga värden och driftvillkor att logga. Motivera varför tomgångsvärdet inte räcker.</a:t>
+              <a:t>Arbetsgång: Ange vilka värden och driftförhållanden som ska loggas samtidigt, och förklara varför ett värde utan last inte räcker.</a:t>
             </a:r>
           </a:p>
         </p:txBody>
@@ -13454,7 +13355,7 @@
                 <a:ea typeface="Calibri"/>
                 <a:cs typeface="Calibri"/>
               </a:rPr>
-              <a:t>Ett fel uppträder bara vid hög belastning. Vilken information bör samlas utöver ett enstaka tomgångsvärde?</a:t>
+              <a:t>Ett fel visar sig bara vid hög belastning. Vilken information behöver du samla in, utöver ett enstaka värde utan last?</a:t>
             </a:r>
           </a:p>
         </p:txBody>
@@ -13787,7 +13688,7 @@
                 <a:ea typeface="Calibri"/>
                 <a:cs typeface="Calibri"/>
               </a:rPr>
-              <a:t>Funktion under rätt driftfall, föreskrivna säkerhetskontroller och dokumenterad återlämning ger stöd för avslut.</a:t>
+              <a:t>För att säga ”klart” behövs en funktionskontroll under de förhållanden då felet uppstod, de föreskrivna säkerhetskontrollerna och en dokumenterad överlämning.</a:t>
             </a:r>
           </a:p>
         </p:txBody>
@@ -13844,7 +13745,7 @@
                 <a:ea typeface="Calibri"/>
                 <a:cs typeface="Calibri"/>
               </a:rPr>
-              <a:t>Förutsättningar: En ledningsanslutning har åtgärdats. Inga efterkontroller är ännu redovisade.</a:t>
+              <a:t>Förutsättningar: En ledningsanslutning har åtgärdats. Inga kontroller efteråt är redovisade än.</a:t>
             </a:r>
           </a:p>
         </p:txBody>
@@ -13901,7 +13802,7 @@
                 <a:ea typeface="Calibri"/>
                 <a:cs typeface="Calibri"/>
               </a:rPr>
-              <a:t>Arbetsgång: Ange vad som ska kontrolleras och dokumenteras. Avgränsa sådant som fortfarande är oprövat.</a:t>
+              <a:t>Arbetsgång: Ange vad som ska kontrolleras och dokumenteras, och skriv vad som fortfarande inte är provat.</a:t>
             </a:r>
           </a:p>
         </p:txBody>

--- a/sjoskolan/vecka-45/aktuell/v45_01_Systematisk_felsokning_elev.pptx
+++ b/sjoskolan/vecka-45/aktuell/v45_01_Systematisk_felsokning_elev.pptx
@@ -3789,7 +3789,7 @@
                 <a:ea typeface="Calibri"/>
                 <a:cs typeface="Calibri"/>
               </a:rPr>
-              <a:t>Stöd till övning 1</a:t>
+              <a:t>Stöd till övning 1.1</a:t>
             </a:r>
           </a:p>
         </p:txBody>
@@ -4178,7 +4178,7 @@
                 <a:ea typeface="Calibri"/>
                 <a:cs typeface="Calibri"/>
               </a:rPr>
-              <a:t>Övning 1</a:t>
+              <a:t>Övning 1.1</a:t>
             </a:r>
           </a:p>
         </p:txBody>
@@ -4513,7 +4513,7 @@
                 <a:ea typeface="Calibri"/>
                 <a:cs typeface="Calibri"/>
               </a:rPr>
-              <a:t>Stöd till övning 2</a:t>
+              <a:t>Stöd till övning 1.2</a:t>
             </a:r>
           </a:p>
         </p:txBody>
@@ -4902,7 +4902,7 @@
                 <a:ea typeface="Calibri"/>
                 <a:cs typeface="Calibri"/>
               </a:rPr>
-              <a:t>Övning 2</a:t>
+              <a:t>Övning 1.2</a:t>
             </a:r>
           </a:p>
         </p:txBody>
@@ -5237,7 +5237,7 @@
                 <a:ea typeface="Calibri"/>
                 <a:cs typeface="Calibri"/>
               </a:rPr>
-              <a:t>Stöd till övning 3</a:t>
+              <a:t>Stöd till övning 1.3</a:t>
             </a:r>
           </a:p>
         </p:txBody>
@@ -5626,7 +5626,7 @@
                 <a:ea typeface="Calibri"/>
                 <a:cs typeface="Calibri"/>
               </a:rPr>
-              <a:t>Övning 3</a:t>
+              <a:t>Övning 1.3</a:t>
             </a:r>
           </a:p>
         </p:txBody>
@@ -5961,7 +5961,7 @@
                 <a:ea typeface="Calibri"/>
                 <a:cs typeface="Calibri"/>
               </a:rPr>
-              <a:t>Stöd till övning 4</a:t>
+              <a:t>Stöd till övning 1.4</a:t>
             </a:r>
           </a:p>
         </p:txBody>
@@ -6428,7 +6428,7 @@
                 <a:ea typeface="Calibri"/>
                 <a:cs typeface="Calibri"/>
               </a:rPr>
-              <a:t>Övning 4</a:t>
+              <a:t>Övning 1.4</a:t>
             </a:r>
           </a:p>
         </p:txBody>
@@ -6787,7 +6787,7 @@
                 <a:ea typeface="Calibri"/>
                 <a:cs typeface="Calibri"/>
               </a:rPr>
-              <a:t>Stöd till övning 5</a:t>
+              <a:t>Stöd till övning 1.5</a:t>
             </a:r>
           </a:p>
         </p:txBody>
@@ -7220,7 +7220,7 @@
                 <a:ea typeface="Calibri"/>
                 <a:cs typeface="Calibri"/>
               </a:rPr>
-              <a:t>Övning 5</a:t>
+              <a:t>Övning 1.5</a:t>
             </a:r>
           </a:p>
         </p:txBody>
@@ -10052,7 +10052,7 @@
                 <a:ea typeface="Calibri"/>
                 <a:cs typeface="Calibri"/>
               </a:rPr>
-              <a:t>Stöd till övning 6</a:t>
+              <a:t>Stöd till övning 1.6</a:t>
             </a:r>
           </a:p>
         </p:txBody>
@@ -10441,7 +10441,7 @@
                 <a:ea typeface="Calibri"/>
                 <a:cs typeface="Calibri"/>
               </a:rPr>
-              <a:t>Övning 6</a:t>
+              <a:t>Övning 1.6</a:t>
             </a:r>
           </a:p>
         </p:txBody>
@@ -10776,7 +10776,7 @@
                 <a:ea typeface="Calibri"/>
                 <a:cs typeface="Calibri"/>
               </a:rPr>
-              <a:t>Stöd till övning 7</a:t>
+              <a:t>Stöd till övning 1.7</a:t>
             </a:r>
           </a:p>
         </p:txBody>
@@ -11253,7 +11253,7 @@
                 <a:ea typeface="Calibri"/>
                 <a:cs typeface="Calibri"/>
               </a:rPr>
-              <a:t>Övning 7</a:t>
+              <a:t>Övning 1.7</a:t>
             </a:r>
           </a:p>
         </p:txBody>
@@ -11612,7 +11612,7 @@
                 <a:ea typeface="Calibri"/>
                 <a:cs typeface="Calibri"/>
               </a:rPr>
-              <a:t>Stöd till övning 8</a:t>
+              <a:t>Stöd till övning 1.8</a:t>
             </a:r>
           </a:p>
         </p:txBody>
@@ -12515,7 +12515,7 @@
                 <a:ea typeface="Calibri"/>
                 <a:cs typeface="Calibri"/>
               </a:rPr>
-              <a:t>Övning 8</a:t>
+              <a:t>Övning 1.8</a:t>
             </a:r>
           </a:p>
         </p:txBody>
@@ -12850,7 +12850,7 @@
                 <a:ea typeface="Calibri"/>
                 <a:cs typeface="Calibri"/>
               </a:rPr>
-              <a:t>Stöd till övning 9</a:t>
+              <a:t>Stöd till övning 1.9</a:t>
             </a:r>
           </a:p>
         </p:txBody>
@@ -13239,7 +13239,7 @@
                 <a:ea typeface="Calibri"/>
                 <a:cs typeface="Calibri"/>
               </a:rPr>
-              <a:t>Övning 9</a:t>
+              <a:t>Övning 1.9</a:t>
             </a:r>
           </a:p>
         </p:txBody>
@@ -13574,7 +13574,7 @@
                 <a:ea typeface="Calibri"/>
                 <a:cs typeface="Calibri"/>
               </a:rPr>
-              <a:t>Stöd till övning 10</a:t>
+              <a:t>Stöd till övning 1.10</a:t>
             </a:r>
           </a:p>
         </p:txBody>
@@ -13963,7 +13963,7 @@
                 <a:ea typeface="Calibri"/>
                 <a:cs typeface="Calibri"/>
               </a:rPr>
-              <a:t>Övning 10</a:t>
+              <a:t>Övning 1.10</a:t>
             </a:r>
           </a:p>
         </p:txBody>

--- a/sjoskolan/vecka-45/aktuell/v45_01_Systematisk_felsokning_elev.pptx
+++ b/sjoskolan/vecka-45/aktuell/v45_01_Systematisk_felsokning_elev.pptx
@@ -8114,7 +8114,7 @@
                 <a:ea typeface="Calibri"/>
                 <a:cs typeface="Calibri"/>
               </a:rPr>
-              <a:t>Teori och exempel följs av övning 6–10.</a:t>
+              <a:t>Teori och exempel följs av övning 1.6–1.10.</a:t>
             </a:r>
           </a:p>
           <a:p xmlns:a="http://schemas.openxmlformats.org/drawingml/2006/main">
@@ -12137,7 +12137,7 @@
                 <a:ea typeface="Calibri"/>
                 <a:cs typeface="Calibri"/>
               </a:rPr>
-              <a:t>15 min övning 1, 2, 4, 5 min återkoppling</a:t>
+              <a:t>15 min övning 1.1, 1.2 och 1.4, 5 min återkoppling</a:t>
             </a:r>
           </a:p>
         </p:txBody>
@@ -12251,7 +12251,7 @@
                 <a:ea typeface="Calibri"/>
                 <a:cs typeface="Calibri"/>
               </a:rPr>
-              <a:t>20 min teori och exempel, 15 min övning 6, 7, 8</a:t>
+              <a:t>20 min teori och exempel, 15 min övning 1.6, 1.7 och 1.8</a:t>
             </a:r>
           </a:p>
           <a:p xmlns:a="http://schemas.openxmlformats.org/drawingml/2006/main">

--- a/sjoskolan/vecka-45/aktuell/v45_01_Systematisk_felsokning_elev.pptx
+++ b/sjoskolan/vecka-45/aktuell/v45_01_Systematisk_felsokning_elev.pptx
@@ -4570,7 +4570,7 @@
                 <a:ea typeface="Calibri"/>
                 <a:cs typeface="Calibri"/>
               </a:rPr>
-              <a:t>Källa, kraftväg, styrning, skydd och last</a:t>
+              <a:t>Följ energin från nätet till pumpen och styrsignalen från knappen till kontaktorn.</a:t>
             </a:r>
           </a:p>
         </p:txBody>
@@ -5018,7 +5018,7 @@
                 <a:ea typeface="Calibri"/>
                 <a:cs typeface="Calibri"/>
               </a:rPr>
-              <a:t>En pump startar inte. Nämn fyra funktioner du behöver kontrollera innan du dömer ut någon komponent.</a:t>
+              <a:t>En pump startar inte. Nämn minst fyra funktioner du behöver kontrollera innan du dömer ut någon komponent.</a:t>
             </a:r>
           </a:p>
         </p:txBody>
@@ -5742,7 +5742,7 @@
                 <a:ea typeface="Calibri"/>
                 <a:cs typeface="Calibri"/>
               </a:rPr>
-              <a:t>Källan visar 24 V men punkt B i mitten har 0 V mot hel retur. Vilken del prioriteras?</a:t>
+              <a:t>Källan visar 24 V. Punkt B, mitt i kedjan, visar 0 V mot returen. Returen är hel. Var letar du först: före B eller efter B?</a:t>
             </a:r>
           </a:p>
         </p:txBody>
@@ -6018,7 +6018,18 @@
                 <a:ea typeface="Calibri"/>
                 <a:cs typeface="Calibri"/>
               </a:rPr>
-              <a:t>Öppen seriegren: I = 0</a:t>
+              <a:t>I = U/R</a:t>
+            </a:r>
+            <a:r>
+              <a:rPr sz="2400" b="1" baseline="-25000">
+                <a:solidFill>
+                  <a:srgbClr val="064F91"/>
+                </a:solidFill>
+                <a:latin typeface="Calibri"/>
+                <a:ea typeface="Calibri"/>
+                <a:cs typeface="Calibri"/>
+              </a:rPr>
+              <a:t>total</a:t>
             </a:r>
           </a:p>
           <a:p xmlns:a="http://schemas.openxmlformats.org/drawingml/2006/main">
@@ -6063,7 +6074,29 @@
                 <a:ea typeface="Calibri"/>
                 <a:cs typeface="Calibri"/>
               </a:rPr>
-              <a:t> = R · I; Ukontakt = U</a:t>
+              <a:t> = R · I; U</a:t>
+            </a:r>
+            <a:r>
+              <a:rPr sz="2400" b="1" baseline="-25000">
+                <a:solidFill>
+                  <a:srgbClr val="064F91"/>
+                </a:solidFill>
+                <a:latin typeface="Calibri"/>
+                <a:ea typeface="Calibri"/>
+                <a:cs typeface="Calibri"/>
+              </a:rPr>
+              <a:t>kontakt</a:t>
+            </a:r>
+            <a:r>
+              <a:rPr sz="2400" b="1">
+                <a:solidFill>
+                  <a:srgbClr val="064F91"/>
+                </a:solidFill>
+                <a:latin typeface="Calibri"/>
+                <a:ea typeface="Calibri"/>
+                <a:cs typeface="Calibri"/>
+              </a:rPr>
+              <a:t> = U</a:t>
             </a:r>
             <a:r>
               <a:rPr sz="2400" b="1" baseline="-25000">
@@ -6153,7 +6186,7 @@
                 <a:ea typeface="Calibri"/>
                 <a:cs typeface="Calibri"/>
               </a:rPr>
-              <a:t>En öppen kontakt stoppar strömmen, och utan ström blir det ingen spänning över resistorn.</a:t>
+              <a:t>Hur stor är resistansen i en öppen kontakt? Vad betyder det för strömmen i en seriekrets?</a:t>
             </a:r>
           </a:p>
         </p:txBody>
@@ -7336,7 +7369,7 @@
                 <a:ea typeface="Calibri"/>
                 <a:cs typeface="Calibri"/>
               </a:rPr>
-              <a:t>En ideal 24 V-källa kortsluts av misstag genom en väg med den totala resistansen R = 0,10 Ω. Beräkna strömmen och ange varför svaret bara är en uppskattning.</a:t>
+              <a:t>En 24 V-källa kortsluts av misstag. Kortslutningen har resistansen 0,10 Ω. a) Beräkna strömmen. b) Varför blir den verkliga strömmen mindre än din uträkning?</a:t>
             </a:r>
           </a:p>
         </p:txBody>
@@ -8382,7 +8415,7 @@
                 <a:ea typeface="Calibri"/>
                 <a:cs typeface="Calibri"/>
               </a:rPr>
-              <a:t>En kortslutning ger en oavsiktlig lågimpediv väg.</a:t>
+              <a:t>En kortslutning är en oavsiktlig väg med låg impedans.</a:t>
             </a:r>
           </a:p>
         </p:txBody>
@@ -12631,7 +12664,7 @@
                 <a:ea typeface="Calibri"/>
                 <a:cs typeface="Calibri"/>
               </a:rPr>
-              <a:t>K1 drar när START hålls inne och släpper när knappen släpps. Vilken kontroll kan visa om felet sitter i hållvägen eller om det är matningen som inte räcker?</a:t>
+              <a:t>K1 drar när du håller in START. K1 släpper när du släpper START. Felet kan sitta i hållvägen eller i matningen. Vilken mätning visar vilket det är?</a:t>
             </a:r>
           </a:p>
         </p:txBody>
@@ -13355,7 +13388,7 @@
                 <a:ea typeface="Calibri"/>
                 <a:cs typeface="Calibri"/>
               </a:rPr>
-              <a:t>Ett fel visar sig bara vid hög belastning. Vilken information behöver du samla in, utöver ett enstaka värde utan last?</a:t>
+              <a:t>Ett fel syns bara när lasten är stor. En mätning utan last räcker inte. Vad ska du mäta, och när?</a:t>
             </a:r>
           </a:p>
         </p:txBody>
@@ -13688,7 +13721,7 @@
                 <a:ea typeface="Calibri"/>
                 <a:cs typeface="Calibri"/>
               </a:rPr>
-              <a:t>För att säga ”klart” behövs en funktionskontroll under de förhållanden då felet uppstod, de föreskrivna säkerhetskontrollerna och en dokumenterad överlämning.</a:t>
+              <a:t>Tänk på tre saker: fungerar det nu? Är det säkert? Vet nästa person vad som är gjort?</a:t>
             </a:r>
           </a:p>
         </p:txBody>
@@ -14079,7 +14112,7 @@
                 <a:ea typeface="Calibri"/>
                 <a:cs typeface="Calibri"/>
               </a:rPr>
-              <a:t>En ledningsanslutning har åtgärdats. Vilka kontroller behövs innan rapporten säger ”klart”?</a:t>
+              <a:t>En anslutning är lagad. Vad måste du kontrollera innan du skriver ”klart” i rapporten?</a:t>
             </a:r>
           </a:p>
         </p:txBody>
@@ -16353,7 +16386,7 @@
                 <a:ea typeface="Calibri"/>
                 <a:cs typeface="Calibri"/>
               </a:rPr>
-              <a:t>Dela systemet i källa, matningsväg, styrning och last.</a:t>
+              <a:t>Dela systemet i källa, matningsväg, skydd, styrning och last.</a:t>
             </a:r>
           </a:p>
           <a:p xmlns:a="http://schemas.openxmlformats.org/drawingml/2006/main">

--- a/sjoskolan/vecka-45/aktuell/v45_01_Systematisk_felsokning_elev.pptx
+++ b/sjoskolan/vecka-45/aktuell/v45_01_Systematisk_felsokning_elev.pptx
@@ -7251,7 +7251,7 @@
                 </a:solidFill>
                 <a:latin typeface="Calibri"/>
               </a:rPr>
-              <a:t>1. Gör övning 1.6–1.10 på delsidan för del 4. Ledtrådar och facit finns där.</a:t>
+              <a:t>1. Läs del 4: teorin och de två exemplen. Tryck på ”Jag har läst del 4” längst ned på sidan.</a:t>
             </a:r>
           </a:p>
           <a:p>
@@ -7270,7 +7270,7 @@
                 </a:solidFill>
                 <a:latin typeface="Calibri"/>
               </a:rPr>
-              <a:t>2. Skriv felsökningsrapporten: felsök två felmoduler i Hållkretslabbet, en i taget. Lämna in de två felsökningsraderna ur protokollet.</a:t>
+              <a:t>2. Gör övning 1.6–1.10 på delsidan för del 4. Ledtrådar och facit finns där.</a:t>
             </a:r>
           </a:p>
           <a:p>
@@ -7289,7 +7289,26 @@
                 </a:solidFill>
                 <a:latin typeface="Calibri"/>
               </a:rPr>
-              <a:t>3. Nästa vecka: vecka 44, Elsystem och mätteknik. Måndag 26 oktober 09.00.</a:t>
+              <a:t>3. Skriv felsökningsrapporten, inlämning 4: felsök två felmoduler i Hållkretslabbet, en i taget. Lämna in de två felsökningsraderna ur protokollet.</a:t>
+            </a:r>
+          </a:p>
+          <a:p>
+            <a:pPr algn="l">
+              <a:lnSpc>
+                <a:spcPct val="108000"/>
+              </a:lnSpc>
+              <a:spcAft>
+                <a:spcPts val="1400"/>
+              </a:spcAft>
+            </a:pPr>
+            <a:r>
+              <a:rPr sz="2000" b="0" i="0">
+                <a:solidFill>
+                  <a:srgbClr val="111111"/>
+                </a:solidFill>
+                <a:latin typeface="Calibri"/>
+              </a:rPr>
+              <a:t>4. Nästa vecka: vecka 44, Elsystem och mätteknik. Måndag 26 oktober 09.00.</a:t>
             </a:r>
           </a:p>
           <a:p>

--- a/sjoskolan/vecka-45/aktuell/v45_01_Systematisk_felsokning_elev.pptx
+++ b/sjoskolan/vecka-45/aktuell/v45_01_Systematisk_felsokning_elev.pptx
@@ -3492,7 +3492,7 @@
         <p:spPr>
           <a:xfrm>
             <a:off x="548640" y="1005840"/>
-            <a:ext cx="6035040" cy="1645920"/>
+            <a:ext cx="6035040" cy="914400"/>
           </a:xfrm>
           <a:prstGeom prst="rect">
             <a:avLst/>
@@ -3533,7 +3533,7 @@
         </p:nvSpPr>
         <p:spPr>
           <a:xfrm>
-            <a:off x="548640" y="2697480"/>
+            <a:off x="548640" y="1965960"/>
             <a:ext cx="5669280" cy="914400"/>
           </a:xfrm>
           <a:prstGeom prst="rect">
@@ -3575,7 +3575,7 @@
         </p:nvSpPr>
         <p:spPr>
           <a:xfrm>
-            <a:off x="548640" y="3703320"/>
+            <a:off x="548640" y="2971800"/>
             <a:ext cx="5852160" cy="411480"/>
           </a:xfrm>
           <a:prstGeom prst="rect">
@@ -7289,7 +7289,7 @@
                 </a:solidFill>
                 <a:latin typeface="Calibri"/>
               </a:rPr>
-              <a:t>3. Skriv felsökningsrapporten, inlämning 4: felsök två felmoduler i Hållkretslabbet, en i taget. Lämna in de två felsökningsraderna ur protokollet.</a:t>
+              <a:t>3. Skriv felsökningsrapporten, inlämning 4: felsök två felmoduler i Hållkretslabbet, en i taget, och fyll i rapportens fält för båda.</a:t>
             </a:r>
           </a:p>
           <a:p>
@@ -7308,7 +7308,7 @@
                 </a:solidFill>
                 <a:latin typeface="Calibri"/>
               </a:rPr>
-              <a:t>4. Nästa vecka: vecka 44, Elsystem och mätteknik. Måndag 26 oktober 09.00.</a:t>
+              <a:t>4. Nästa vecka: vecka 44, Elsystem, mätteknik och repetition. Måndag 26 oktober 09.00.</a:t>
             </a:r>
           </a:p>
           <a:p>
@@ -7327,7 +7327,7 @@
                 </a:solidFill>
                 <a:latin typeface="Calibri"/>
               </a:rPr>
-              <a:t>Inlämningen och felsökningsrapporten senast i dag, fredag 23 oktober. Allt finns på veckosidan.</a:t>
+              <a:t>Inlämningen, uppgift 1–4, senast i dag, fredag 23 oktober. Allt finns på veckosidan.</a:t>
             </a:r>
           </a:p>
         </p:txBody>
@@ -9046,7 +9046,7 @@
                 </a:solidFill>
                 <a:latin typeface="Calibri"/>
               </a:rPr>
-              <a:t>Pass 2: Felsökningens metod och vanliga fel (avsnitt 1–7)</a:t>
+              <a:t>Pass 2: Observation, arbetsgång och halvering (avsnitt 1–4) och ett exempel</a:t>
             </a:r>
           </a:p>
         </p:txBody>
@@ -9130,7 +9130,7 @@
                 </a:solidFill>
                 <a:latin typeface="Calibri"/>
               </a:rPr>
-              <a:t>Övning 1.1, 1.2 och 1.3 tillsammans, efter avsnitt 4</a:t>
+              <a:t>Övning 1.1, 1.2 och 1.3 tillsammans</a:t>
             </a:r>
           </a:p>
         </p:txBody>
@@ -9172,7 +9172,7 @@
                 </a:solidFill>
                 <a:latin typeface="Calibri"/>
               </a:rPr>
-              <a:t>10.40</a:t>
+              <a:t>10.30</a:t>
             </a:r>
           </a:p>
         </p:txBody>
@@ -9214,7 +9214,7 @@
                 </a:solidFill>
                 <a:latin typeface="Calibri"/>
               </a:rPr>
-              <a:t>Övning 1.4 och 1.5 tillsammans, efter avsnitt 7</a:t>
+              <a:t>Avbrott, glapp och en skiljande kontroll (avsnitt 5–7) och ett exempel</a:t>
             </a:r>
           </a:p>
         </p:txBody>
@@ -9256,7 +9256,7 @@
                 </a:solidFill>
                 <a:latin typeface="Calibri"/>
               </a:rPr>
-              <a:t>10.50</a:t>
+              <a:t>10.40</a:t>
             </a:r>
           </a:p>
         </p:txBody>
@@ -9298,6 +9298,90 @@
                 </a:solidFill>
                 <a:latin typeface="Calibri"/>
               </a:rPr>
+              <a:t>Övning 1.4 och 1.5 tillsammans</a:t>
+            </a:r>
+          </a:p>
+        </p:txBody>
+      </p:sp>
+      <p:sp>
+        <p:nvSpPr>
+          <p:cNvPr id="14" name="TextBox 13"/>
+          <p:cNvSpPr txBox="1"/>
+          <p:nvPr/>
+        </p:nvSpPr>
+        <p:spPr>
+          <a:xfrm>
+            <a:off x="640080" y="4251960"/>
+            <a:ext cx="1005840" cy="512064"/>
+          </a:xfrm>
+          <a:prstGeom prst="rect">
+            <a:avLst/>
+          </a:prstGeom>
+          <a:noFill/>
+        </p:spPr>
+        <p:txBody>
+          <a:bodyPr wrap="square" anchor="ctr" lIns="27432" rIns="27432" tIns="18288" bIns="18288">
+            <a:spAutoFit/>
+          </a:bodyPr>
+          <a:lstStyle/>
+          <a:p>
+            <a:pPr algn="l">
+              <a:lnSpc>
+                <a:spcPct val="108000"/>
+              </a:lnSpc>
+              <a:spcAft>
+                <a:spcPts val="0"/>
+              </a:spcAft>
+            </a:pPr>
+            <a:r>
+              <a:rPr sz="1800" b="1" i="0">
+                <a:solidFill>
+                  <a:srgbClr val="064F91"/>
+                </a:solidFill>
+                <a:latin typeface="Calibri"/>
+              </a:rPr>
+              <a:t>10.50</a:t>
+            </a:r>
+          </a:p>
+        </p:txBody>
+      </p:sp>
+      <p:sp>
+        <p:nvSpPr>
+          <p:cNvPr id="15" name="TextBox 14"/>
+          <p:cNvSpPr txBox="1"/>
+          <p:nvPr/>
+        </p:nvSpPr>
+        <p:spPr>
+          <a:xfrm>
+            <a:off x="1783080" y="4251960"/>
+            <a:ext cx="6720840" cy="512064"/>
+          </a:xfrm>
+          <a:prstGeom prst="rect">
+            <a:avLst/>
+          </a:prstGeom>
+          <a:noFill/>
+        </p:spPr>
+        <p:txBody>
+          <a:bodyPr wrap="square" anchor="ctr" lIns="27432" rIns="27432" tIns="18288" bIns="18288">
+            <a:spAutoFit/>
+          </a:bodyPr>
+          <a:lstStyle/>
+          <a:p>
+            <a:pPr algn="l">
+              <a:lnSpc>
+                <a:spcPct val="108000"/>
+              </a:lnSpc>
+              <a:spcAft>
+                <a:spcPts val="0"/>
+              </a:spcAft>
+            </a:pPr>
+            <a:r>
+              <a:rPr sz="1800" b="0" i="0">
+                <a:solidFill>
+                  <a:srgbClr val="111111"/>
+                </a:solidFill>
+                <a:latin typeface="Calibri"/>
+              </a:rPr>
               <a:t>Avslutsfråga, sammanfattning och det här gör du nu</a:t>
             </a:r>
           </a:p>
@@ -9305,7 +9389,7 @@
       </p:sp>
       <p:pic>
         <p:nvPicPr>
-          <p:cNvPr id="14" name="Picture 13" descr="sidfot.jpg"/>
+          <p:cNvPr id="16" name="Picture 15" descr="sidfot.jpg"/>
           <p:cNvPicPr>
             <a:picLocks noChangeAspect="1"/>
           </p:cNvPicPr>
@@ -9329,7 +9413,7 @@
       </p:pic>
       <p:sp>
         <p:nvSpPr>
-          <p:cNvPr id="15" name="TextBox 14"/>
+          <p:cNvPr id="17" name="TextBox 16"/>
           <p:cNvSpPr txBox="1"/>
           <p:nvPr/>
         </p:nvSpPr>
@@ -9371,7 +9455,7 @@
       </p:sp>
       <p:sp>
         <p:nvSpPr>
-          <p:cNvPr id="16" name="TextBox 15"/>
+          <p:cNvPr id="18" name="TextBox 17"/>
           <p:cNvSpPr txBox="1"/>
           <p:nvPr/>
         </p:nvSpPr>

--- a/sjoskolan/vecka-45/aktuell/v45_01_Systematisk_felsokning_elev.pptx
+++ b/sjoskolan/vecka-45/aktuell/v45_01_Systematisk_felsokning_elev.pptx
@@ -3492,7 +3492,7 @@
         <p:spPr>
           <a:xfrm>
             <a:off x="548640" y="1005840"/>
-            <a:ext cx="6035040" cy="914400"/>
+            <a:ext cx="6035040" cy="1645920"/>
           </a:xfrm>
           <a:prstGeom prst="rect">
             <a:avLst/>
@@ -3533,7 +3533,7 @@
         </p:nvSpPr>
         <p:spPr>
           <a:xfrm>
-            <a:off x="548640" y="1965960"/>
+            <a:off x="548640" y="2697480"/>
             <a:ext cx="5669280" cy="914400"/>
           </a:xfrm>
           <a:prstGeom prst="rect">
@@ -3575,7 +3575,7 @@
         </p:nvSpPr>
         <p:spPr>
           <a:xfrm>
-            <a:off x="548640" y="2971800"/>
+            <a:off x="548640" y="3703320"/>
             <a:ext cx="5852160" cy="411480"/>
           </a:xfrm>
           <a:prstGeom prst="rect">
@@ -4037,7 +4037,7 @@
                 </a:solidFill>
                 <a:latin typeface="Calibri"/>
               </a:rPr>
-              <a:t>Övning 1.1</a:t>
+              <a:t>Övning 1.2</a:t>
             </a:r>
           </a:p>
         </p:txBody>
@@ -4079,7 +4079,7 @@
                 </a:solidFill>
                 <a:latin typeface="Calibri"/>
               </a:rPr>
-              <a:t>Observation eller diagnos</a:t>
+              <a:t>Uppdelning</a:t>
             </a:r>
           </a:p>
         </p:txBody>
@@ -4163,7 +4163,7 @@
                 </a:solidFill>
                 <a:latin typeface="Calibri"/>
               </a:rPr>
-              <a:t>Övning 1.2</a:t>
+              <a:t>Övning 1.3</a:t>
             </a:r>
           </a:p>
         </p:txBody>
@@ -4205,147 +4205,21 @@
                 </a:solidFill>
                 <a:latin typeface="Calibri"/>
               </a:rPr>
-              <a:t>Uppdelning</a:t>
-            </a:r>
-          </a:p>
-        </p:txBody>
-      </p:sp>
-      <p:sp>
-        <p:nvSpPr>
-          <p:cNvPr id="11" name="Rectangle 10"/>
-          <p:cNvSpPr/>
-          <p:nvPr/>
-        </p:nvSpPr>
-        <p:spPr>
-          <a:xfrm>
-            <a:off x="548640" y="3410712"/>
-            <a:ext cx="8046720" cy="566928"/>
-          </a:xfrm>
-          <a:prstGeom prst="rect">
-            <a:avLst/>
-          </a:prstGeom>
-          <a:solidFill>
-            <a:srgbClr val="F2F5F9"/>
-          </a:solidFill>
-          <a:ln>
-            <a:noFill/>
-          </a:ln>
-          <a:effectLst/>
-        </p:spPr>
-        <p:style>
-          <a:lnRef idx="1">
-            <a:schemeClr val="accent1"/>
-          </a:lnRef>
-          <a:fillRef idx="3">
-            <a:schemeClr val="accent1"/>
-          </a:fillRef>
-          <a:effectRef idx="2">
-            <a:schemeClr val="accent1"/>
-          </a:effectRef>
-          <a:fontRef idx="minor">
-            <a:schemeClr val="lt1"/>
-          </a:fontRef>
-        </p:style>
-        <p:txBody>
-          <a:bodyPr rtlCol="0" anchor="ctr"/>
-          <a:lstStyle/>
-          <a:p/>
-        </p:txBody>
-      </p:sp>
-      <p:sp>
-        <p:nvSpPr>
-          <p:cNvPr id="12" name="TextBox 11"/>
+              <a:t>Mittpunkt</a:t>
+            </a:r>
+          </a:p>
+        </p:txBody>
+      </p:sp>
+      <p:sp>
+        <p:nvSpPr>
+          <p:cNvPr id="11" name="TextBox 10"/>
           <p:cNvSpPr txBox="1"/>
           <p:nvPr/>
         </p:nvSpPr>
         <p:spPr>
           <a:xfrm>
-            <a:off x="685800" y="3410712"/>
-            <a:ext cx="1737360" cy="566928"/>
-          </a:xfrm>
-          <a:prstGeom prst="rect">
-            <a:avLst/>
-          </a:prstGeom>
-          <a:noFill/>
-        </p:spPr>
-        <p:txBody>
-          <a:bodyPr wrap="square" anchor="ctr" lIns="27432" rIns="27432" tIns="18288" bIns="18288">
-            <a:spAutoFit/>
-          </a:bodyPr>
-          <a:lstStyle/>
-          <a:p>
-            <a:pPr algn="l">
-              <a:lnSpc>
-                <a:spcPct val="108000"/>
-              </a:lnSpc>
-              <a:spcAft>
-                <a:spcPts val="0"/>
-              </a:spcAft>
-            </a:pPr>
-            <a:r>
-              <a:rPr sz="2000" b="1" i="0">
-                <a:solidFill>
-                  <a:srgbClr val="111111"/>
-                </a:solidFill>
-                <a:latin typeface="Calibri"/>
-              </a:rPr>
-              <a:t>Övning 1.3</a:t>
-            </a:r>
-          </a:p>
-        </p:txBody>
-      </p:sp>
-      <p:sp>
-        <p:nvSpPr>
-          <p:cNvPr id="13" name="TextBox 12"/>
-          <p:cNvSpPr txBox="1"/>
-          <p:nvPr/>
-        </p:nvSpPr>
-        <p:spPr>
-          <a:xfrm>
-            <a:off x="2468880" y="3410712"/>
-            <a:ext cx="6035040" cy="566928"/>
-          </a:xfrm>
-          <a:prstGeom prst="rect">
-            <a:avLst/>
-          </a:prstGeom>
-          <a:noFill/>
-        </p:spPr>
-        <p:txBody>
-          <a:bodyPr wrap="square" anchor="ctr" lIns="27432" rIns="27432" tIns="18288" bIns="18288">
-            <a:spAutoFit/>
-          </a:bodyPr>
-          <a:lstStyle/>
-          <a:p>
-            <a:pPr algn="l">
-              <a:lnSpc>
-                <a:spcPct val="108000"/>
-              </a:lnSpc>
-              <a:spcAft>
-                <a:spcPts val="0"/>
-              </a:spcAft>
-            </a:pPr>
-            <a:r>
-              <a:rPr sz="2000" b="0" i="0">
-                <a:solidFill>
-                  <a:srgbClr val="111111"/>
-                </a:solidFill>
-                <a:latin typeface="Calibri"/>
-              </a:rPr>
-              <a:t>Mittpunkt</a:t>
-            </a:r>
-          </a:p>
-        </p:txBody>
-      </p:sp>
-      <p:sp>
-        <p:nvSpPr>
-          <p:cNvPr id="14" name="TextBox 13"/>
-          <p:cNvSpPr txBox="1"/>
-          <p:nvPr/>
-        </p:nvSpPr>
-        <p:spPr>
-          <a:xfrm>
-            <a:off x="548640" y="4224528"/>
-            <a:ext cx="8046720" cy="1673351"/>
+            <a:off x="548640" y="3547872"/>
+            <a:ext cx="8046720" cy="2350008"/>
           </a:xfrm>
           <a:prstGeom prst="rect">
             <a:avLst/>
@@ -4373,7 +4247,7 @@
                 </a:solidFill>
                 <a:latin typeface="Calibri"/>
               </a:rPr>
-              <a:t>Tre minuter per övning. Skriv ditt svar i chatten. Ledtrådar och facit finns på delsidan.</a:t>
+              <a:t>Arbeta själv i åtta minuter. Ange sökområde och motivera nästa kontroll. Använd ledtråd vid behov. Jämför sedan med facit och diskutera resonemanget i fyra minuter.</a:t>
             </a:r>
           </a:p>
           <a:p>
@@ -4399,7 +4273,7 @@
       </p:sp>
       <p:pic>
         <p:nvPicPr>
-          <p:cNvPr id="15" name="Picture 14" descr="sidfot.jpg"/>
+          <p:cNvPr id="12" name="Picture 11" descr="sidfot.jpg"/>
           <p:cNvPicPr>
             <a:picLocks noChangeAspect="1"/>
           </p:cNvPicPr>
@@ -4423,7 +4297,7 @@
       </p:pic>
       <p:sp>
         <p:nvSpPr>
-          <p:cNvPr id="16" name="TextBox 15"/>
+          <p:cNvPr id="13" name="TextBox 12"/>
           <p:cNvSpPr txBox="1"/>
           <p:nvPr/>
         </p:nvSpPr>
@@ -4465,7 +4339,7 @@
       </p:sp>
       <p:sp>
         <p:nvSpPr>
-          <p:cNvPr id="17" name="TextBox 16"/>
+          <p:cNvPr id="14" name="TextBox 13"/>
           <p:cNvSpPr txBox="1"/>
           <p:nvPr/>
         </p:nvSpPr>
@@ -6186,7 +6060,7 @@
                 </a:solidFill>
                 <a:latin typeface="Calibri"/>
               </a:rPr>
-              <a:t>Övning 1.4</a:t>
+              <a:t>Övning 1.10</a:t>
             </a:r>
           </a:p>
         </p:txBody>
@@ -6228,147 +6102,21 @@
                 </a:solidFill>
                 <a:latin typeface="Calibri"/>
               </a:rPr>
-              <a:t>Spänning över avbrott</a:t>
-            </a:r>
-          </a:p>
-        </p:txBody>
-      </p:sp>
-      <p:sp>
-        <p:nvSpPr>
-          <p:cNvPr id="8" name="Rectangle 7"/>
-          <p:cNvSpPr/>
-          <p:nvPr/>
-        </p:nvSpPr>
-        <p:spPr>
-          <a:xfrm>
-            <a:off x="548640" y="2734056"/>
-            <a:ext cx="8046720" cy="566928"/>
-          </a:xfrm>
-          <a:prstGeom prst="rect">
-            <a:avLst/>
-          </a:prstGeom>
-          <a:solidFill>
-            <a:srgbClr val="F2F5F9"/>
-          </a:solidFill>
-          <a:ln>
-            <a:noFill/>
-          </a:ln>
-          <a:effectLst/>
-        </p:spPr>
-        <p:style>
-          <a:lnRef idx="1">
-            <a:schemeClr val="accent1"/>
-          </a:lnRef>
-          <a:fillRef idx="3">
-            <a:schemeClr val="accent1"/>
-          </a:fillRef>
-          <a:effectRef idx="2">
-            <a:schemeClr val="accent1"/>
-          </a:effectRef>
-          <a:fontRef idx="minor">
-            <a:schemeClr val="lt1"/>
-          </a:fontRef>
-        </p:style>
-        <p:txBody>
-          <a:bodyPr rtlCol="0" anchor="ctr"/>
-          <a:lstStyle/>
-          <a:p/>
-        </p:txBody>
-      </p:sp>
-      <p:sp>
-        <p:nvSpPr>
-          <p:cNvPr id="9" name="TextBox 8"/>
+              <a:t>Efter åtgärd</a:t>
+            </a:r>
+          </a:p>
+        </p:txBody>
+      </p:sp>
+      <p:sp>
+        <p:nvSpPr>
+          <p:cNvPr id="8" name="TextBox 7"/>
           <p:cNvSpPr txBox="1"/>
           <p:nvPr/>
         </p:nvSpPr>
         <p:spPr>
           <a:xfrm>
-            <a:off x="685800" y="2734056"/>
-            <a:ext cx="1737360" cy="566928"/>
-          </a:xfrm>
-          <a:prstGeom prst="rect">
-            <a:avLst/>
-          </a:prstGeom>
-          <a:noFill/>
-        </p:spPr>
-        <p:txBody>
-          <a:bodyPr wrap="square" anchor="ctr" lIns="27432" rIns="27432" tIns="18288" bIns="18288">
-            <a:spAutoFit/>
-          </a:bodyPr>
-          <a:lstStyle/>
-          <a:p>
-            <a:pPr algn="l">
-              <a:lnSpc>
-                <a:spcPct val="108000"/>
-              </a:lnSpc>
-              <a:spcAft>
-                <a:spcPts val="0"/>
-              </a:spcAft>
-            </a:pPr>
-            <a:r>
-              <a:rPr sz="2000" b="1" i="0">
-                <a:solidFill>
-                  <a:srgbClr val="111111"/>
-                </a:solidFill>
-                <a:latin typeface="Calibri"/>
-              </a:rPr>
-              <a:t>Övning 1.5</a:t>
-            </a:r>
-          </a:p>
-        </p:txBody>
-      </p:sp>
-      <p:sp>
-        <p:nvSpPr>
-          <p:cNvPr id="10" name="TextBox 9"/>
-          <p:cNvSpPr txBox="1"/>
-          <p:nvPr/>
-        </p:nvSpPr>
-        <p:spPr>
-          <a:xfrm>
-            <a:off x="2468880" y="2734056"/>
-            <a:ext cx="6035040" cy="566928"/>
-          </a:xfrm>
-          <a:prstGeom prst="rect">
-            <a:avLst/>
-          </a:prstGeom>
-          <a:noFill/>
-        </p:spPr>
-        <p:txBody>
-          <a:bodyPr wrap="square" anchor="ctr" lIns="27432" rIns="27432" tIns="18288" bIns="18288">
-            <a:spAutoFit/>
-          </a:bodyPr>
-          <a:lstStyle/>
-          <a:p>
-            <a:pPr algn="l">
-              <a:lnSpc>
-                <a:spcPct val="108000"/>
-              </a:lnSpc>
-              <a:spcAft>
-                <a:spcPts val="0"/>
-              </a:spcAft>
-            </a:pPr>
-            <a:r>
-              <a:rPr sz="2000" b="0" i="0">
-                <a:solidFill>
-                  <a:srgbClr val="111111"/>
-                </a:solidFill>
-                <a:latin typeface="Calibri"/>
-              </a:rPr>
-              <a:t>Felström i en förenklad beräkning</a:t>
-            </a:r>
-          </a:p>
-        </p:txBody>
-      </p:sp>
-      <p:sp>
-        <p:nvSpPr>
-          <p:cNvPr id="11" name="TextBox 10"/>
-          <p:cNvSpPr txBox="1"/>
-          <p:nvPr/>
-        </p:nvSpPr>
-        <p:spPr>
-          <a:xfrm>
-            <a:off x="548640" y="3547872"/>
-            <a:ext cx="8046720" cy="2350008"/>
+            <a:off x="548640" y="2871216"/>
+            <a:ext cx="8046720" cy="3026664"/>
           </a:xfrm>
           <a:prstGeom prst="rect">
             <a:avLst/>
@@ -6396,7 +6144,7 @@
                 </a:solidFill>
                 <a:latin typeface="Calibri"/>
               </a:rPr>
-              <a:t>Fem minuter per övning. Skriv ditt svar i chatten. Övning 1.6–1.10 gör du själv efter lektionen.</a:t>
+              <a:t>Först åtta minuter med lampkretsen: två hypoteser, mätpunkter, driftläge och förväntat resultat. Sedan fem minuter med övning 1.10 och egen jämförelse med facit. Använd inga labbfelmoduler här.</a:t>
             </a:r>
           </a:p>
           <a:p>
@@ -6422,7 +6170,7 @@
       </p:sp>
       <p:pic>
         <p:nvPicPr>
-          <p:cNvPr id="12" name="Picture 11" descr="sidfot.jpg"/>
+          <p:cNvPr id="9" name="Picture 8" descr="sidfot.jpg"/>
           <p:cNvPicPr>
             <a:picLocks noChangeAspect="1"/>
           </p:cNvPicPr>
@@ -6446,7 +6194,7 @@
       </p:pic>
       <p:sp>
         <p:nvSpPr>
-          <p:cNvPr id="13" name="TextBox 12"/>
+          <p:cNvPr id="10" name="TextBox 9"/>
           <p:cNvSpPr txBox="1"/>
           <p:nvPr/>
         </p:nvSpPr>
@@ -6488,7 +6236,7 @@
       </p:sp>
       <p:sp>
         <p:nvSpPr>
-          <p:cNvPr id="14" name="TextBox 13"/>
+          <p:cNvPr id="11" name="TextBox 10"/>
           <p:cNvSpPr txBox="1"/>
           <p:nvPr/>
         </p:nvSpPr>
@@ -7270,7 +7018,7 @@
                 </a:solidFill>
                 <a:latin typeface="Calibri"/>
               </a:rPr>
-              <a:t>2. Gör övning 1.6–1.10 på delsidan för del 4. Ledtrådar och facit finns där.</a:t>
+              <a:t>2. Frivillig extra träning: övning 1.1, 1.4–1.9 i del 4. Prioritera inlämningen. Ledtrådar och facit finns på delsidan.</a:t>
             </a:r>
           </a:p>
           <a:p>
@@ -9088,7 +8836,7 @@
                 </a:solidFill>
                 <a:latin typeface="Calibri"/>
               </a:rPr>
-              <a:t>10.20</a:t>
+              <a:t>10.15</a:t>
             </a:r>
           </a:p>
         </p:txBody>
@@ -9130,7 +8878,7 @@
                 </a:solidFill>
                 <a:latin typeface="Calibri"/>
               </a:rPr>
-              <a:t>Övning 1.1, 1.2 och 1.3 tillsammans</a:t>
+              <a:t>Eget försök och jämförelse: övning 1.2 och 1.3</a:t>
             </a:r>
           </a:p>
         </p:txBody>
@@ -9172,7 +8920,7 @@
                 </a:solidFill>
                 <a:latin typeface="Calibri"/>
               </a:rPr>
-              <a:t>10.30</a:t>
+              <a:t>10.27</a:t>
             </a:r>
           </a:p>
         </p:txBody>
@@ -9214,7 +8962,7 @@
                 </a:solidFill>
                 <a:latin typeface="Calibri"/>
               </a:rPr>
-              <a:t>Avbrott, glapp och en skiljande kontroll (avsnitt 5–7) och ett exempel</a:t>
+              <a:t>Avbrott, glapp och en skiljande kontroll (avsnitt 5–7)</a:t>
             </a:r>
           </a:p>
         </p:txBody>
@@ -9256,7 +9004,7 @@
                 </a:solidFill>
                 <a:latin typeface="Calibri"/>
               </a:rPr>
-              <a:t>10.40</a:t>
+              <a:t>10.37</a:t>
             </a:r>
           </a:p>
         </p:txBody>
@@ -9298,7 +9046,7 @@
                 </a:solidFill>
                 <a:latin typeface="Calibri"/>
               </a:rPr>
-              <a:t>Övning 1.4 och 1.5 tillsammans</a:t>
+              <a:t>Lampkretsen: välj kontroll. Övning 1.10: verifiera och dokumentera</a:t>
             </a:r>
           </a:p>
         </p:txBody>
